--- a/docs/t2.pptx
+++ b/docs/t2.pptx
@@ -3543,22 +3543,42 @@
               </a:rPr>
               <a:t>Мы ищем минимум функции потерь </a:t>
             </a:r>
-            <m:oMath xmlns:m="http://schemas.openxmlformats.org/officeDocument/2006/math" xmlns:mml="http://www.w3.org/1998/Math/MathML">
-              <m:r>
-                <m:t>J(θ)</m:t>
-              </m:r>
-            </m:oMath>
+            <ns0:m xmlns:ns0="http://schemas.microsoft.com/office/drawing/2010/main">
+              <m:oMathPara xmlns:m="http://schemas.openxmlformats.org/officeDocument/2006/math">
+                <m:oMath xmlns:mml="http://www.w3.org/1998/Math/MathML">
+                  <m:r>
+                    <a:rPr sz="2200">
+                      <a:latin typeface="Cambria Math"/>
+                    </a:rPr>
+                    <a:rPr sz="2200">
+                      <a:latin typeface="Cambria Math"/>
+                    </a:rPr>
+                    <m:t>J(θ)</m:t>
+                  </m:r>
+                </m:oMath>
+              </m:oMathPara>
+            </ns0:m>
             <a:r>
               <a:rPr sz="2200" b="0" i="0">
                 <a:latin typeface="Bookman Old Style"/>
               </a:rPr>
               <a:t>, которая определяет ошибку предсказания модели. Наша цель — найти такие параметры </a:t>
             </a:r>
-            <m:oMath xmlns:m="http://schemas.openxmlformats.org/officeDocument/2006/math" xmlns:mml="http://www.w3.org/1998/Math/MathML">
-              <m:r>
-                <m:t>θ</m:t>
-              </m:r>
-            </m:oMath>
+            <ns0:m xmlns:ns0="http://schemas.microsoft.com/office/drawing/2010/main">
+              <m:oMathPara xmlns:m="http://schemas.openxmlformats.org/officeDocument/2006/math">
+                <m:oMath xmlns:mml="http://www.w3.org/1998/Math/MathML">
+                  <m:r>
+                    <a:rPr sz="2200">
+                      <a:latin typeface="Cambria Math"/>
+                    </a:rPr>
+                    <a:rPr sz="2200">
+                      <a:latin typeface="Cambria Math"/>
+                    </a:rPr>
+                    <m:t>θ</m:t>
+                  </m:r>
+                </m:oMath>
+              </m:oMathPara>
+            </ns0:m>
             <a:r>
               <a:rPr sz="2200" b="0" i="0">
                 <a:latin typeface="Bookman Old Style"/>
@@ -3573,46 +3593,90 @@
                 <a:spcPct val="115000"/>
               </a:lnSpc>
             </a:pPr>
-            <m:oMath xmlns:m="http://schemas.openxmlformats.org/officeDocument/2006/math" xmlns:mml="http://www.w3.org/1998/Math/MathML">
-              <m:sSup>
-                <m:e>
+            <ns0:m xmlns:ns0="http://schemas.microsoft.com/office/drawing/2010/main">
+              <m:oMathPara xmlns:m="http://schemas.openxmlformats.org/officeDocument/2006/math">
+                <m:oMath xmlns:mml="http://www.w3.org/1998/Math/MathML">
+                  <m:sSup>
+                    <m:e>
+                      <m:r>
+                        <a:rPr sz="2200">
+                          <a:latin typeface="Cambria Math"/>
+                        </a:rPr>
+                        <a:rPr sz="2200">
+                          <a:latin typeface="Cambria Math"/>
+                        </a:rPr>
+                        <m:t>θ</m:t>
+                      </m:r>
+                    </m:e>
+                    <m:sup>
+                      <m:r>
+                        <a:rPr sz="2200">
+                          <a:latin typeface="Cambria Math"/>
+                        </a:rPr>
+                        <a:rPr sz="2200">
+                          <a:latin typeface="Cambria Math"/>
+                        </a:rPr>
+                        <m:t>*</m:t>
+                      </m:r>
+                    </m:sup>
+                  </m:sSup>
                   <m:r>
-                    <m:t>θ</m:t>
+                    <a:rPr sz="2200">
+                      <a:latin typeface="Cambria Math"/>
+                    </a:rPr>
+                    <a:rPr sz="2200">
+                      <a:latin typeface="Cambria Math"/>
+                    </a:rPr>
+                    <m:t>=</m:t>
                   </m:r>
-                </m:e>
-                <m:sup>
                   <m:r>
-                    <m:t>*</m:t>
+                    <a:rPr sz="2200">
+                      <a:latin typeface="Cambria Math"/>
+                    </a:rPr>
+                    <a:rPr sz="2200">
+                      <a:latin typeface="Cambria Math"/>
+                    </a:rPr>
+                    <m:rPr>
+                      <m:sty m:val="p"/>
+                    </m:rPr>
+                    <m:t>\arg</m:t>
                   </m:r>
-                </m:sup>
-              </m:sSup>
-              <m:r>
-                <m:t>=</m:t>
-              </m:r>
-              <m:r>
-                <m:rPr>
-                  <m:sty m:val="p"/>
-                  <m:sz m:val="44"/>
-                  <m:rFonts m:ascii="Cambria Math" m:hAnsi="Cambria Math"/>
-                </m:rPr>
-                <m:t>\arg</m:t>
-              </m:r>
-              <m:sSub>
-                <m:e>
+                  <m:sSub>
+                    <m:e>
+                      <m:r>
+                        <a:rPr sz="2200">
+                          <a:latin typeface="Cambria Math"/>
+                        </a:rPr>
+                        <a:rPr sz="2200">
+                          <a:latin typeface="Cambria Math"/>
+                        </a:rPr>
+                        <m:t>min</m:t>
+                      </m:r>
+                    </m:e>
+                    <m:sub>
+                      <m:r>
+                        <a:rPr sz="2200">
+                          <a:latin typeface="Cambria Math"/>
+                        </a:rPr>
+                        <a:rPr sz="2200">
+                          <a:latin typeface="Cambria Math"/>
+                        </a:rPr>
+                        <m:t>θ</m:t>
+                      </m:r>
+                    </m:sub>
+                  </m:sSub>
                   <m:r>
-                    <m:t>min</m:t>
+                    <a:rPr sz="2200">
+                      <a:latin typeface="Cambria Math"/>
+                    </a:rPr>
+                    <a:rPr sz="2200">
+                      <a:latin typeface="Cambria Math"/>
+                    </a:rPr>
+                    <m:t>J(θ)</m:t>
                   </m:r>
-                </m:e>
-                <m:sub>
-                  <m:r>
-                    <m:t>θ</m:t>
-                  </m:r>
-                </m:sub>
-              </m:sSub>
-              <m:r>
-                <m:t>J(θ)</m:t>
-              </m:r>
-            </m:oMath>
+                </m:oMath>
+              </m:oMathPara>
+            </ns0:m>
           </a:p>
           <a:p>
             <a:pPr marL="0" indent="0">
@@ -3634,103 +3698,204 @@
               <a:t>
 </a:t>
             </a:r>
-            <m:oMath xmlns:m="http://schemas.openxmlformats.org/officeDocument/2006/math" xmlns:mml="http://www.w3.org/1998/Math/MathML">
-              <m:r>
-                <m:t>J(θ)=</m:t>
-              </m:r>
-              <m:f>
-                <m:fPr>
-                  <m:type m:val="bar"/>
-                </m:fPr>
-                <m:num>
+            <ns0:m xmlns:ns0="http://schemas.microsoft.com/office/drawing/2010/main">
+              <m:oMathPara xmlns:m="http://schemas.openxmlformats.org/officeDocument/2006/math">
+                <m:oMath xmlns:mml="http://www.w3.org/1998/Math/MathML">
                   <m:r>
-                    <m:t>1</m:t>
+                    <a:rPr sz="2200">
+                      <a:latin typeface="Cambria Math"/>
+                    </a:rPr>
+                    <a:rPr sz="2200">
+                      <a:latin typeface="Cambria Math"/>
+                    </a:rPr>
+                    <m:t>J(θ)=</m:t>
                   </m:r>
-                </m:num>
-                <m:den>
-                  <m:r>
-                    <m:t>2m</m:t>
-                  </m:r>
-                </m:den>
-              </m:f>
-              <m:nary>
-                <m:naryPr>
-                  <m:chr m:val="∑"/>
-                  <m:limLoc m:val="subSup"/>
-                  <m:grow m:val="1"/>
-                  <m:subHide m:val="off"/>
-                  <m:supHide m:val="off"/>
-                </m:naryPr>
-                <m:sub>
-                  <m:r>
-                    <m:t>i=1</m:t>
-                  </m:r>
-                </m:sub>
-                <m:sup>
-                  <m:r>
-                    <m:t>m</m:t>
-                  </m:r>
-                </m:sup>
-                <m:e/>
-              </m:nary>
-              <m:r>
-                <m:t>(</m:t>
-              </m:r>
-              <m:sSub>
-                <m:e>
-                  <m:r>
-                    <m:t>h</m:t>
-                  </m:r>
-                </m:e>
-                <m:sub>
-                  <m:r>
-                    <m:t>θ</m:t>
-                  </m:r>
-                </m:sub>
-              </m:sSub>
-              <m:r>
-                <m:t>(</m:t>
-              </m:r>
-              <m:sSup>
-                <m:e>
-                  <m:r>
-                    <m:t>x</m:t>
-                  </m:r>
-                </m:e>
-                <m:sup>
-                  <m:r>
-                    <m:t>(i)</m:t>
-                  </m:r>
-                </m:sup>
-              </m:sSup>
-              <m:r>
-                <m:t>)−</m:t>
-              </m:r>
-              <m:sSup>
-                <m:e>
-                  <m:r>
-                    <m:t>y</m:t>
-                  </m:r>
-                </m:e>
-                <m:sup>
-                  <m:r>
-                    <m:t>(i)</m:t>
-                  </m:r>
-                </m:sup>
-              </m:sSup>
-              <m:sSup>
-                <m:e>
-                  <m:r>
-                    <m:t>)</m:t>
-                  </m:r>
-                </m:e>
-                <m:sup>
-                  <m:r>
-                    <m:t>2</m:t>
-                  </m:r>
-                </m:sup>
-              </m:sSup>
-            </m:oMath>
+                  <m:f>
+                    <m:fPr>
+                      <m:type m:val="bar"/>
+                    </m:fPr>
+                    <m:num>
+                      <m:r>
+                        <a:rPr sz="2200">
+                          <a:latin typeface="Cambria Math"/>
+                        </a:rPr>
+                        <a:rPr sz="2200">
+                          <a:latin typeface="Cambria Math"/>
+                        </a:rPr>
+                        <m:t>1</m:t>
+                      </m:r>
+                    </m:num>
+                    <m:den>
+                      <m:r>
+                        <a:rPr sz="2200">
+                          <a:latin typeface="Cambria Math"/>
+                        </a:rPr>
+                        <a:rPr sz="2200">
+                          <a:latin typeface="Cambria Math"/>
+                        </a:rPr>
+                        <m:t>2m</m:t>
+                      </m:r>
+                    </m:den>
+                  </m:f>
+                  <m:nary>
+                    <m:naryPr>
+                      <m:chr m:val="∑"/>
+                      <m:limLoc m:val="subSup"/>
+                      <m:grow m:val="1"/>
+                      <m:subHide m:val="off"/>
+                      <m:supHide m:val="off"/>
+                    </m:naryPr>
+                    <m:sub>
+                      <m:r>
+                        <a:rPr sz="2200">
+                          <a:latin typeface="Cambria Math"/>
+                        </a:rPr>
+                        <a:rPr sz="2200">
+                          <a:latin typeface="Cambria Math"/>
+                        </a:rPr>
+                        <m:t>i=1</m:t>
+                      </m:r>
+                    </m:sub>
+                    <m:sup>
+                      <m:r>
+                        <a:rPr sz="2200">
+                          <a:latin typeface="Cambria Math"/>
+                        </a:rPr>
+                        <a:rPr sz="2200">
+                          <a:latin typeface="Cambria Math"/>
+                        </a:rPr>
+                        <m:t>m</m:t>
+                      </m:r>
+                    </m:sup>
+                    <m:e>
+                      <m:r>
+                        <a:rPr sz="2200">
+                          <a:latin typeface="Cambria Math"/>
+                        </a:rPr>
+                        <a:rPr sz="2200">
+                          <a:latin typeface="Cambria Math"/>
+                        </a:rPr>
+                        <m:t>(</m:t>
+                      </m:r>
+                      <m:sSub>
+                        <m:e>
+                          <m:r>
+                            <a:rPr sz="2200">
+                              <a:latin typeface="Cambria Math"/>
+                            </a:rPr>
+                            <a:rPr sz="2200">
+                              <a:latin typeface="Cambria Math"/>
+                            </a:rPr>
+                            <m:t>h</m:t>
+                          </m:r>
+                        </m:e>
+                        <m:sub>
+                          <m:r>
+                            <a:rPr sz="2200">
+                              <a:latin typeface="Cambria Math"/>
+                            </a:rPr>
+                            <a:rPr sz="2200">
+                              <a:latin typeface="Cambria Math"/>
+                            </a:rPr>
+                            <m:t>θ</m:t>
+                          </m:r>
+                        </m:sub>
+                      </m:sSub>
+                      <m:r>
+                        <a:rPr sz="2200">
+                          <a:latin typeface="Cambria Math"/>
+                        </a:rPr>
+                        <a:rPr sz="2200">
+                          <a:latin typeface="Cambria Math"/>
+                        </a:rPr>
+                        <m:t>(</m:t>
+                      </m:r>
+                      <m:sSup>
+                        <m:e>
+                          <m:r>
+                            <a:rPr sz="2200">
+                              <a:latin typeface="Cambria Math"/>
+                            </a:rPr>
+                            <a:rPr sz="2200">
+                              <a:latin typeface="Cambria Math"/>
+                            </a:rPr>
+                            <m:t>x</m:t>
+                          </m:r>
+                        </m:e>
+                        <m:sup>
+                          <m:r>
+                            <a:rPr sz="2200">
+                              <a:latin typeface="Cambria Math"/>
+                            </a:rPr>
+                            <a:rPr sz="2200">
+                              <a:latin typeface="Cambria Math"/>
+                            </a:rPr>
+                            <m:t>(i)</m:t>
+                          </m:r>
+                        </m:sup>
+                      </m:sSup>
+                      <m:r>
+                        <a:rPr sz="2200">
+                          <a:latin typeface="Cambria Math"/>
+                        </a:rPr>
+                        <a:rPr sz="2200">
+                          <a:latin typeface="Cambria Math"/>
+                        </a:rPr>
+                        <m:t>)−</m:t>
+                      </m:r>
+                      <m:sSup>
+                        <m:e>
+                          <m:r>
+                            <a:rPr sz="2200">
+                              <a:latin typeface="Cambria Math"/>
+                            </a:rPr>
+                            <a:rPr sz="2200">
+                              <a:latin typeface="Cambria Math"/>
+                            </a:rPr>
+                            <m:t>y</m:t>
+                          </m:r>
+                        </m:e>
+                        <m:sup>
+                          <m:r>
+                            <a:rPr sz="2200">
+                              <a:latin typeface="Cambria Math"/>
+                            </a:rPr>
+                            <a:rPr sz="2200">
+                              <a:latin typeface="Cambria Math"/>
+                            </a:rPr>
+                            <m:t>(i)</m:t>
+                          </m:r>
+                        </m:sup>
+                      </m:sSup>
+                      <m:sSup>
+                        <m:e>
+                          <m:r>
+                            <a:rPr sz="2200">
+                              <a:latin typeface="Cambria Math"/>
+                            </a:rPr>
+                            <a:rPr sz="2200">
+                              <a:latin typeface="Cambria Math"/>
+                            </a:rPr>
+                            <m:t>)</m:t>
+                          </m:r>
+                        </m:e>
+                        <m:sup>
+                          <m:r>
+                            <a:rPr sz="2200">
+                              <a:latin typeface="Cambria Math"/>
+                            </a:rPr>
+                            <a:rPr sz="2200">
+                              <a:latin typeface="Cambria Math"/>
+                            </a:rPr>
+                            <m:t>2</m:t>
+                          </m:r>
+                        </m:sup>
+                      </m:sSup>
+                    </m:e>
+                  </m:nary>
+                </m:oMath>
+              </m:oMathPara>
+            </ns0:m>
           </a:p>
         </p:txBody>
       </p:sp>
@@ -3899,96 +4064,182 @@
               </a:rPr>
               <a:t>Чтобы прийти к минимуму, мы делаем шаги в сторону, противоположную вектору градиента. Правило обновления для каждого параметра </a:t>
             </a:r>
-            <m:oMath xmlns:m="http://schemas.openxmlformats.org/officeDocument/2006/math" xmlns:mml="http://www.w3.org/1998/Math/MathML">
-              <m:sSub>
-                <m:e>
-                  <m:r>
-                    <m:t>θ</m:t>
-                  </m:r>
-                </m:e>
-                <m:sub>
-                  <m:r>
-                    <m:t>j</m:t>
-                  </m:r>
-                </m:sub>
-              </m:sSub>
-            </m:oMath>
-            <a:r>
-              <a:rPr sz="2200" b="0" i="0">
-                <a:latin typeface="Bookman Old Style"/>
-              </a:rPr>
-              <a:t> выглядит следующим образом:</a:t>
-            </a:r>
-          </a:p>
-          <a:p>
-            <a:pPr marL="0" indent="0">
-              <a:buNone/>
-              <a:lnSpc>
-                <a:spcPct val="115000"/>
-              </a:lnSpc>
-            </a:pPr>
-            <m:oMath xmlns:m="http://schemas.openxmlformats.org/officeDocument/2006/math" xmlns:mml="http://www.w3.org/1998/Math/MathML">
-              <m:sSub>
-                <m:e>
-                  <m:r>
-                    <m:t>θ</m:t>
-                  </m:r>
-                </m:e>
-                <m:sub>
-                  <m:r>
-                    <m:t>j</m:t>
-                  </m:r>
-                </m:sub>
-              </m:sSub>
-              <m:r>
-                <m:t>:=</m:t>
-              </m:r>
-              <m:sSub>
-                <m:e>
-                  <m:r>
-                    <m:t>θ</m:t>
-                  </m:r>
-                </m:e>
-                <m:sub>
-                  <m:r>
-                    <m:t>j</m:t>
-                  </m:r>
-                </m:sub>
-              </m:sSub>
-              <m:r>
-                <m:t>−α</m:t>
-              </m:r>
-              <m:f>
-                <m:fPr>
-                  <m:type m:val="bar"/>
-                </m:fPr>
-                <m:num>
-                  <m:r>
-                    <m:t>∂</m:t>
-                  </m:r>
-                </m:num>
-                <m:den>
-                  <m:r>
-                    <m:t>∂</m:t>
-                  </m:r>
+            <ns0:m xmlns:ns0="http://schemas.microsoft.com/office/drawing/2010/main">
+              <m:oMathPara xmlns:m="http://schemas.openxmlformats.org/officeDocument/2006/math">
+                <m:oMath xmlns:mml="http://www.w3.org/1998/Math/MathML">
                   <m:sSub>
                     <m:e>
                       <m:r>
+                        <a:rPr sz="2200">
+                          <a:latin typeface="Cambria Math"/>
+                        </a:rPr>
+                        <a:rPr sz="2200">
+                          <a:latin typeface="Cambria Math"/>
+                        </a:rPr>
                         <m:t>θ</m:t>
                       </m:r>
                     </m:e>
                     <m:sub>
                       <m:r>
+                        <a:rPr sz="2200">
+                          <a:latin typeface="Cambria Math"/>
+                        </a:rPr>
+                        <a:rPr sz="2200">
+                          <a:latin typeface="Cambria Math"/>
+                        </a:rPr>
                         <m:t>j</m:t>
                       </m:r>
                     </m:sub>
                   </m:sSub>
-                </m:den>
-              </m:f>
-              <m:r>
-                <m:t>J(θ)</m:t>
-              </m:r>
-            </m:oMath>
+                </m:oMath>
+              </m:oMathPara>
+            </ns0:m>
+            <a:r>
+              <a:rPr sz="2200" b="0" i="0">
+                <a:latin typeface="Bookman Old Style"/>
+              </a:rPr>
+              <a:t> выглядит следующим образом:</a:t>
+            </a:r>
+          </a:p>
+          <a:p>
+            <a:pPr marL="0" indent="0">
+              <a:buNone/>
+              <a:lnSpc>
+                <a:spcPct val="115000"/>
+              </a:lnSpc>
+            </a:pPr>
+            <ns0:m xmlns:ns0="http://schemas.microsoft.com/office/drawing/2010/main">
+              <m:oMathPara xmlns:m="http://schemas.openxmlformats.org/officeDocument/2006/math">
+                <m:oMath xmlns:mml="http://www.w3.org/1998/Math/MathML">
+                  <m:sSub>
+                    <m:e>
+                      <m:r>
+                        <a:rPr sz="2200">
+                          <a:latin typeface="Cambria Math"/>
+                        </a:rPr>
+                        <a:rPr sz="2200">
+                          <a:latin typeface="Cambria Math"/>
+                        </a:rPr>
+                        <m:t>θ</m:t>
+                      </m:r>
+                    </m:e>
+                    <m:sub>
+                      <m:r>
+                        <a:rPr sz="2200">
+                          <a:latin typeface="Cambria Math"/>
+                        </a:rPr>
+                        <a:rPr sz="2200">
+                          <a:latin typeface="Cambria Math"/>
+                        </a:rPr>
+                        <m:t>j</m:t>
+                      </m:r>
+                    </m:sub>
+                  </m:sSub>
+                  <m:r>
+                    <a:rPr sz="2200">
+                      <a:latin typeface="Cambria Math"/>
+                    </a:rPr>
+                    <a:rPr sz="2200">
+                      <a:latin typeface="Cambria Math"/>
+                    </a:rPr>
+                    <m:t>:=</m:t>
+                  </m:r>
+                  <m:sSub>
+                    <m:e>
+                      <m:r>
+                        <a:rPr sz="2200">
+                          <a:latin typeface="Cambria Math"/>
+                        </a:rPr>
+                        <a:rPr sz="2200">
+                          <a:latin typeface="Cambria Math"/>
+                        </a:rPr>
+                        <m:t>θ</m:t>
+                      </m:r>
+                    </m:e>
+                    <m:sub>
+                      <m:r>
+                        <a:rPr sz="2200">
+                          <a:latin typeface="Cambria Math"/>
+                        </a:rPr>
+                        <a:rPr sz="2200">
+                          <a:latin typeface="Cambria Math"/>
+                        </a:rPr>
+                        <m:t>j</m:t>
+                      </m:r>
+                    </m:sub>
+                  </m:sSub>
+                  <m:r>
+                    <a:rPr sz="2200">
+                      <a:latin typeface="Cambria Math"/>
+                    </a:rPr>
+                    <a:rPr sz="2200">
+                      <a:latin typeface="Cambria Math"/>
+                    </a:rPr>
+                    <m:t>−α</m:t>
+                  </m:r>
+                  <m:f>
+                    <m:fPr>
+                      <m:type m:val="bar"/>
+                    </m:fPr>
+                    <m:num>
+                      <m:r>
+                        <a:rPr sz="2200">
+                          <a:latin typeface="Cambria Math"/>
+                        </a:rPr>
+                        <a:rPr sz="2200">
+                          <a:latin typeface="Cambria Math"/>
+                        </a:rPr>
+                        <m:t>∂</m:t>
+                      </m:r>
+                    </m:num>
+                    <m:den>
+                      <m:r>
+                        <a:rPr sz="2200">
+                          <a:latin typeface="Cambria Math"/>
+                        </a:rPr>
+                        <a:rPr sz="2200">
+                          <a:latin typeface="Cambria Math"/>
+                        </a:rPr>
+                        <m:t>∂</m:t>
+                      </m:r>
+                      <m:sSub>
+                        <m:e>
+                          <m:r>
+                            <a:rPr sz="2200">
+                              <a:latin typeface="Cambria Math"/>
+                            </a:rPr>
+                            <a:rPr sz="2200">
+                              <a:latin typeface="Cambria Math"/>
+                            </a:rPr>
+                            <m:t>θ</m:t>
+                          </m:r>
+                        </m:e>
+                        <m:sub>
+                          <m:r>
+                            <a:rPr sz="2200">
+                              <a:latin typeface="Cambria Math"/>
+                            </a:rPr>
+                            <a:rPr sz="2200">
+                              <a:latin typeface="Cambria Math"/>
+                            </a:rPr>
+                            <m:t>j</m:t>
+                          </m:r>
+                        </m:sub>
+                      </m:sSub>
+                    </m:den>
+                  </m:f>
+                  <m:r>
+                    <a:rPr sz="2200">
+                      <a:latin typeface="Cambria Math"/>
+                    </a:rPr>
+                    <a:rPr sz="2200">
+                      <a:latin typeface="Cambria Math"/>
+                    </a:rPr>
+                    <m:t>J(θ)</m:t>
+                  </m:r>
+                </m:oMath>
+              </m:oMathPara>
+            </ns0:m>
           </a:p>
           <a:p>
             <a:pPr marL="0" indent="0">
@@ -4013,11 +4264,21 @@
                 <a:spcPts val="0"/>
               </a:spcAft>
             </a:pPr>
-            <m:oMath xmlns:m="http://schemas.openxmlformats.org/officeDocument/2006/math" xmlns:mml="http://www.w3.org/1998/Math/MathML">
-              <m:r>
-                <m:t>α</m:t>
-              </m:r>
-            </m:oMath>
+            <ns0:m xmlns:ns0="http://schemas.microsoft.com/office/drawing/2010/main">
+              <m:oMathPara xmlns:m="http://schemas.openxmlformats.org/officeDocument/2006/math">
+                <m:oMath xmlns:mml="http://www.w3.org/1998/Math/MathML">
+                  <m:r>
+                    <a:rPr sz="2200">
+                      <a:latin typeface="Cambria Math"/>
+                    </a:rPr>
+                    <a:rPr sz="2200">
+                      <a:latin typeface="Cambria Math"/>
+                    </a:rPr>
+                    <m:t>α</m:t>
+                  </m:r>
+                </m:oMath>
+              </m:oMathPara>
+            </ns0:m>
             <a:r>
               <a:rPr sz="2200" b="0" i="0">
                 <a:latin typeface="Bookman Old Style"/>
@@ -4046,38 +4307,72 @@
                 <a:spcPts val="0"/>
               </a:spcAft>
             </a:pPr>
-            <m:oMath xmlns:m="http://schemas.openxmlformats.org/officeDocument/2006/math" xmlns:mml="http://www.w3.org/1998/Math/MathML">
-              <m:f>
-                <m:fPr>
-                  <m:type m:val="bar"/>
-                </m:fPr>
-                <m:num>
+            <ns0:m xmlns:ns0="http://schemas.microsoft.com/office/drawing/2010/main">
+              <m:oMathPara xmlns:m="http://schemas.openxmlformats.org/officeDocument/2006/math">
+                <m:oMath xmlns:mml="http://www.w3.org/1998/Math/MathML">
+                  <m:f>
+                    <m:fPr>
+                      <m:type m:val="bar"/>
+                    </m:fPr>
+                    <m:num>
+                      <m:r>
+                        <a:rPr sz="2200">
+                          <a:latin typeface="Cambria Math"/>
+                        </a:rPr>
+                        <a:rPr sz="2200">
+                          <a:latin typeface="Cambria Math"/>
+                        </a:rPr>
+                        <m:t>∂</m:t>
+                      </m:r>
+                    </m:num>
+                    <m:den>
+                      <m:r>
+                        <a:rPr sz="2200">
+                          <a:latin typeface="Cambria Math"/>
+                        </a:rPr>
+                        <a:rPr sz="2200">
+                          <a:latin typeface="Cambria Math"/>
+                        </a:rPr>
+                        <m:t>∂</m:t>
+                      </m:r>
+                      <m:sSub>
+                        <m:e>
+                          <m:r>
+                            <a:rPr sz="2200">
+                              <a:latin typeface="Cambria Math"/>
+                            </a:rPr>
+                            <a:rPr sz="2200">
+                              <a:latin typeface="Cambria Math"/>
+                            </a:rPr>
+                            <m:t>θ</m:t>
+                          </m:r>
+                        </m:e>
+                        <m:sub>
+                          <m:r>
+                            <a:rPr sz="2200">
+                              <a:latin typeface="Cambria Math"/>
+                            </a:rPr>
+                            <a:rPr sz="2200">
+                              <a:latin typeface="Cambria Math"/>
+                            </a:rPr>
+                            <m:t>j</m:t>
+                          </m:r>
+                        </m:sub>
+                      </m:sSub>
+                    </m:den>
+                  </m:f>
                   <m:r>
-                    <m:t>∂</m:t>
+                    <a:rPr sz="2200">
+                      <a:latin typeface="Cambria Math"/>
+                    </a:rPr>
+                    <a:rPr sz="2200">
+                      <a:latin typeface="Cambria Math"/>
+                    </a:rPr>
+                    <m:t>J(θ)</m:t>
                   </m:r>
-                </m:num>
-                <m:den>
-                  <m:r>
-                    <m:t>∂</m:t>
-                  </m:r>
-                  <m:sSub>
-                    <m:e>
-                      <m:r>
-                        <m:t>θ</m:t>
-                      </m:r>
-                    </m:e>
-                    <m:sub>
-                      <m:r>
-                        <m:t>j</m:t>
-                      </m:r>
-                    </m:sub>
-                  </m:sSub>
-                </m:den>
-              </m:f>
-              <m:r>
-                <m:t>J(θ)</m:t>
-              </m:r>
-            </m:oMath>
+                </m:oMath>
+              </m:oMathPara>
+            </ns0:m>
             <a:r>
               <a:rPr sz="2200" b="0" i="0">
                 <a:latin typeface="Bookman Old Style"/>
@@ -4105,26 +4400,54 @@
               <a:t>
 </a:t>
             </a:r>
-            <m:oMath xmlns:m="http://schemas.openxmlformats.org/officeDocument/2006/math" xmlns:mml="http://www.w3.org/1998/Math/MathML">
-              <m:r>
-                <m:t>θ:=θ−α</m:t>
-              </m:r>
-              <m:sSub>
-                <m:e>
+            <ns0:m xmlns:ns0="http://schemas.microsoft.com/office/drawing/2010/main">
+              <m:oMathPara xmlns:m="http://schemas.openxmlformats.org/officeDocument/2006/math">
+                <m:oMath xmlns:mml="http://www.w3.org/1998/Math/MathML">
                   <m:r>
-                    <m:t>∇</m:t>
+                    <a:rPr sz="2200">
+                      <a:latin typeface="Cambria Math"/>
+                    </a:rPr>
+                    <a:rPr sz="2200">
+                      <a:latin typeface="Cambria Math"/>
+                    </a:rPr>
+                    <m:t>θ:=θ−α</m:t>
                   </m:r>
-                </m:e>
-                <m:sub>
+                  <m:sSub>
+                    <m:e>
+                      <m:r>
+                        <a:rPr sz="2200">
+                          <a:latin typeface="Cambria Math"/>
+                        </a:rPr>
+                        <a:rPr sz="2200">
+                          <a:latin typeface="Cambria Math"/>
+                        </a:rPr>
+                        <m:t>∇</m:t>
+                      </m:r>
+                    </m:e>
+                    <m:sub>
+                      <m:r>
+                        <a:rPr sz="2200">
+                          <a:latin typeface="Cambria Math"/>
+                        </a:rPr>
+                        <a:rPr sz="2200">
+                          <a:latin typeface="Cambria Math"/>
+                        </a:rPr>
+                        <m:t>θ</m:t>
+                      </m:r>
+                    </m:sub>
+                  </m:sSub>
                   <m:r>
-                    <m:t>θ</m:t>
+                    <a:rPr sz="2200">
+                      <a:latin typeface="Cambria Math"/>
+                    </a:rPr>
+                    <a:rPr sz="2200">
+                      <a:latin typeface="Cambria Math"/>
+                    </a:rPr>
+                    <m:t>J(θ)</m:t>
                   </m:r>
-                </m:sub>
-              </m:sSub>
-              <m:r>
-                <m:t>J(θ)</m:t>
-              </m:r>
-            </m:oMath>
+                </m:oMath>
+              </m:oMathPara>
+            </ns0:m>
           </a:p>
         </p:txBody>
       </p:sp>
@@ -4293,11 +4616,21 @@
               </a:rPr>
               <a:t>Градиент </a:t>
             </a:r>
-            <m:oMath xmlns:m="http://schemas.openxmlformats.org/officeDocument/2006/math" xmlns:mml="http://www.w3.org/1998/Math/MathML">
-              <m:r>
-                <m:t>∇f</m:t>
-              </m:r>
-            </m:oMath>
+            <ns0:m xmlns:ns0="http://schemas.microsoft.com/office/drawing/2010/main">
+              <m:oMathPara xmlns:m="http://schemas.openxmlformats.org/officeDocument/2006/math">
+                <m:oMath xmlns:mml="http://www.w3.org/1998/Math/MathML">
+                  <m:r>
+                    <a:rPr sz="2200">
+                      <a:latin typeface="Cambria Math"/>
+                    </a:rPr>
+                    <a:rPr sz="2200">
+                      <a:latin typeface="Cambria Math"/>
+                    </a:rPr>
+                    <m:t>∇f</m:t>
+                  </m:r>
+                </m:oMath>
+              </m:oMathPara>
+            </ns0:m>
             <a:r>
               <a:rPr sz="2200" b="0" i="0">
                 <a:latin typeface="Bookman Old Style"/>
@@ -4312,79 +4645,158 @@
                 <a:spcPct val="115000"/>
               </a:lnSpc>
             </a:pPr>
-            <m:oMath xmlns:m="http://schemas.openxmlformats.org/officeDocument/2006/math" xmlns:mml="http://www.w3.org/1998/Math/MathML">
-              <m:r>
-                <m:t>∇f(x)=[</m:t>
-              </m:r>
-              <m:eqArr>
-                <m:e>
-                  <m:f>
-                    <m:fPr>
-                      <m:type m:val="bar"/>
-                    </m:fPr>
-                    <m:num>
+            <ns0:m xmlns:ns0="http://schemas.microsoft.com/office/drawing/2010/main">
+              <m:oMathPara xmlns:m="http://schemas.openxmlformats.org/officeDocument/2006/math">
+                <m:oMath xmlns:mml="http://www.w3.org/1998/Math/MathML">
+                  <m:r>
+                    <a:rPr sz="2200">
+                      <a:latin typeface="Cambria Math"/>
+                    </a:rPr>
+                    <a:rPr sz="2200">
+                      <a:latin typeface="Cambria Math"/>
+                    </a:rPr>
+                    <m:t>∇f(x)=</m:t>
+                  </m:r>
+                  <m:r>
+                    <a:rPr sz="2200">
+                      <a:latin typeface="Cambria Math"/>
+                    </a:rPr>
+                    <a:rPr sz="2200">
+                      <a:latin typeface="Cambria Math"/>
+                    </a:rPr>
+                    <m:t>[</m:t>
+                  </m:r>
+                  <m:eqArr>
+                    <m:e>
+                      <m:f>
+                        <m:fPr>
+                          <m:type m:val="bar"/>
+                        </m:fPr>
+                        <m:num>
+                          <m:r>
+                            <a:rPr sz="2200">
+                              <a:latin typeface="Cambria Math"/>
+                            </a:rPr>
+                            <a:rPr sz="2200">
+                              <a:latin typeface="Cambria Math"/>
+                            </a:rPr>
+                            <m:t>∂f</m:t>
+                          </m:r>
+                        </m:num>
+                        <m:den>
+                          <m:r>
+                            <a:rPr sz="2200">
+                              <a:latin typeface="Cambria Math"/>
+                            </a:rPr>
+                            <a:rPr sz="2200">
+                              <a:latin typeface="Cambria Math"/>
+                            </a:rPr>
+                            <m:t>∂</m:t>
+                          </m:r>
+                          <m:sSub>
+                            <m:e>
+                              <m:r>
+                                <a:rPr sz="2200">
+                                  <a:latin typeface="Cambria Math"/>
+                                </a:rPr>
+                                <a:rPr sz="2200">
+                                  <a:latin typeface="Cambria Math"/>
+                                </a:rPr>
+                                <m:t>x</m:t>
+                              </m:r>
+                            </m:e>
+                            <m:sub>
+                              <m:r>
+                                <a:rPr sz="2200">
+                                  <a:latin typeface="Cambria Math"/>
+                                </a:rPr>
+                                <a:rPr sz="2200">
+                                  <a:latin typeface="Cambria Math"/>
+                                </a:rPr>
+                                <m:t>1</m:t>
+                              </m:r>
+                            </m:sub>
+                          </m:sSub>
+                        </m:den>
+                      </m:f>
+                    </m:e>
+                    <m:e>
                       <m:r>
-                        <m:t>∂f</m:t>
+                        <a:rPr sz="2200">
+                          <a:latin typeface="Cambria Math"/>
+                        </a:rPr>
+                        <a:rPr sz="2200">
+                          <a:latin typeface="Cambria Math"/>
+                        </a:rPr>
+                        <m:t>⋮</m:t>
                       </m:r>
-                    </m:num>
-                    <m:den>
-                      <m:r>
-                        <m:t>∂</m:t>
-                      </m:r>
-                      <m:sSub>
-                        <m:e>
+                    </m:e>
+                    <m:e>
+                      <m:f>
+                        <m:fPr>
+                          <m:type m:val="bar"/>
+                        </m:fPr>
+                        <m:num>
                           <m:r>
-                            <m:t>x</m:t>
+                            <a:rPr sz="2200">
+                              <a:latin typeface="Cambria Math"/>
+                            </a:rPr>
+                            <a:rPr sz="2200">
+                              <a:latin typeface="Cambria Math"/>
+                            </a:rPr>
+                            <m:t>∂f</m:t>
                           </m:r>
-                        </m:e>
-                        <m:sub>
+                        </m:num>
+                        <m:den>
                           <m:r>
-                            <m:t>1</m:t>
+                            <a:rPr sz="2200">
+                              <a:latin typeface="Cambria Math"/>
+                            </a:rPr>
+                            <a:rPr sz="2200">
+                              <a:latin typeface="Cambria Math"/>
+                            </a:rPr>
+                            <m:t>∂</m:t>
                           </m:r>
-                        </m:sub>
-                      </m:sSub>
-                    </m:den>
-                  </m:f>
-                </m:e>
-                <m:e>
+                          <m:sSub>
+                            <m:e>
+                              <m:r>
+                                <a:rPr sz="2200">
+                                  <a:latin typeface="Cambria Math"/>
+                                </a:rPr>
+                                <a:rPr sz="2200">
+                                  <a:latin typeface="Cambria Math"/>
+                                </a:rPr>
+                                <m:t>x</m:t>
+                              </m:r>
+                            </m:e>
+                            <m:sub>
+                              <m:r>
+                                <a:rPr sz="2200">
+                                  <a:latin typeface="Cambria Math"/>
+                                </a:rPr>
+                                <a:rPr sz="2200">
+                                  <a:latin typeface="Cambria Math"/>
+                                </a:rPr>
+                                <m:t>n</m:t>
+                              </m:r>
+                            </m:sub>
+                          </m:sSub>
+                        </m:den>
+                      </m:f>
+                    </m:e>
+                  </m:eqArr>
                   <m:r>
-                    <m:t>⋮</m:t>
+                    <a:rPr sz="2200">
+                      <a:latin typeface="Cambria Math"/>
+                    </a:rPr>
+                    <a:rPr sz="2200">
+                      <a:latin typeface="Cambria Math"/>
+                    </a:rPr>
+                    <m:t>]</m:t>
                   </m:r>
-                </m:e>
-                <m:e>
-                  <m:f>
-                    <m:fPr>
-                      <m:type m:val="bar"/>
-                    </m:fPr>
-                    <m:num>
-                      <m:r>
-                        <m:t>∂f</m:t>
-                      </m:r>
-                    </m:num>
-                    <m:den>
-                      <m:r>
-                        <m:t>∂</m:t>
-                      </m:r>
-                      <m:sSub>
-                        <m:e>
-                          <m:r>
-                            <m:t>x</m:t>
-                          </m:r>
-                        </m:e>
-                        <m:sub>
-                          <m:r>
-                            <m:t>n</m:t>
-                          </m:r>
-                        </m:sub>
-                      </m:sSub>
-                    </m:den>
-                  </m:f>
-                </m:e>
-              </m:eqArr>
-              <m:r>
-                <m:t>]</m:t>
-              </m:r>
-            </m:oMath>
+                </m:oMath>
+              </m:oMathPara>
+            </ns0:m>
           </a:p>
           <a:p>
             <a:pPr marL="0" indent="0">
@@ -4415,11 +4827,21 @@
               </a:rPr>
               <a:t>Если </a:t>
             </a:r>
-            <m:oMath xmlns:m="http://schemas.openxmlformats.org/officeDocument/2006/math" xmlns:mml="http://www.w3.org/1998/Math/MathML">
-              <m:r>
-                <m:t>α</m:t>
-              </m:r>
-            </m:oMath>
+            <ns0:m xmlns:ns0="http://schemas.microsoft.com/office/drawing/2010/main">
+              <m:oMathPara xmlns:m="http://schemas.openxmlformats.org/officeDocument/2006/math">
+                <m:oMath xmlns:mml="http://www.w3.org/1998/Math/MathML">
+                  <m:r>
+                    <a:rPr sz="2200">
+                      <a:latin typeface="Cambria Math"/>
+                    </a:rPr>
+                    <a:rPr sz="2200">
+                      <a:latin typeface="Cambria Math"/>
+                    </a:rPr>
+                    <m:t>α</m:t>
+                  </m:r>
+                </m:oMath>
+              </m:oMathPara>
+            </ns0:m>
             <a:r>
               <a:rPr sz="2200" b="0" i="0">
                 <a:latin typeface="Bookman Old Style"/>
@@ -4442,11 +4864,21 @@
               </a:rPr>
               <a:t>Если </a:t>
             </a:r>
-            <m:oMath xmlns:m="http://schemas.openxmlformats.org/officeDocument/2006/math" xmlns:mml="http://www.w3.org/1998/Math/MathML">
-              <m:r>
-                <m:t>α</m:t>
-              </m:r>
-            </m:oMath>
+            <ns0:m xmlns:ns0="http://schemas.microsoft.com/office/drawing/2010/main">
+              <m:oMathPara xmlns:m="http://schemas.openxmlformats.org/officeDocument/2006/math">
+                <m:oMath xmlns:mml="http://www.w3.org/1998/Math/MathML">
+                  <m:r>
+                    <a:rPr sz="2200">
+                      <a:latin typeface="Cambria Math"/>
+                    </a:rPr>
+                    <a:rPr sz="2200">
+                      <a:latin typeface="Cambria Math"/>
+                    </a:rPr>
+                    <m:t>α</m:t>
+                  </m:r>
+                </m:oMath>
+              </m:oMathPara>
+            </ns0:m>
             <a:r>
               <a:rPr sz="2200" b="0" i="0">
                 <a:latin typeface="Bookman Old Style"/>
@@ -4469,11 +4901,21 @@
               </a:rPr>
               <a:t>В точке минимума </a:t>
             </a:r>
-            <m:oMath xmlns:m="http://schemas.openxmlformats.org/officeDocument/2006/math" xmlns:mml="http://www.w3.org/1998/Math/MathML">
-              <m:r>
-                <m:t>∇J(θ)≈0</m:t>
-              </m:r>
-            </m:oMath>
+            <ns0:m xmlns:ns0="http://schemas.microsoft.com/office/drawing/2010/main">
+              <m:oMathPara xmlns:m="http://schemas.openxmlformats.org/officeDocument/2006/math">
+                <m:oMath xmlns:mml="http://www.w3.org/1998/Math/MathML">
+                  <m:r>
+                    <a:rPr sz="2200">
+                      <a:latin typeface="Cambria Math"/>
+                    </a:rPr>
+                    <a:rPr sz="2200">
+                      <a:latin typeface="Cambria Math"/>
+                    </a:rPr>
+                    <m:t>∇J(θ)≈0</m:t>
+                  </m:r>
+                </m:oMath>
+              </m:oMathPara>
+            </ns0:m>
             <a:r>
               <a:rPr sz="2200" b="0" i="0">
                 <a:latin typeface="Bookman Old Style"/>

--- a/docs/t2.pptx
+++ b/docs/t2.pptx
@@ -5,13 +5,13 @@
     <p:sldMasterId id="2147483648" r:id="rId1"/>
   </p:sldMasterIdLst>
   <p:sldIdLst>
-    <p:sldId id="256" r:id="rId7"/>
-    <p:sldId id="257" r:id="rId8"/>
-    <p:sldId id="258" r:id="rId9"/>
-    <p:sldId id="259" r:id="rId10"/>
-    <p:sldId id="260" r:id="rId11"/>
+    <p:sldId id="256" r:id="rId2"/>
+    <p:sldId id="257" r:id="rId3"/>
+    <p:sldId id="258" r:id="rId4"/>
+    <p:sldId id="259" r:id="rId5"/>
+    <p:sldId id="260" r:id="rId6"/>
   </p:sldIdLst>
-  <p:sldSz cx="12192000" cy="6858000" type="screen4x3"/>
+  <p:sldSz cx="12192000" cy="6858000"/>
   <p:notesSz cx="6858000" cy="9144000"/>
   <p:defaultTextStyle>
     <a:defPPr>
@@ -108,6 +108,22 @@
       </a:defRPr>
     </a:lvl9pPr>
   </p:defaultTextStyle>
+  <p:extLst>
+    <p:ext uri="{EFAFB233-063F-42B5-8137-9DF3F51BA10A}">
+      <p15:sldGuideLst xmlns:p15="http://schemas.microsoft.com/office/powerpoint/2012/main">
+        <p15:guide id="1" orient="horz" pos="2160">
+          <p15:clr>
+            <a:srgbClr val="A4A3A4"/>
+          </p15:clr>
+        </p15:guide>
+        <p15:guide id="2" pos="2880">
+          <p15:clr>
+            <a:srgbClr val="A4A3A4"/>
+          </p15:clr>
+        </p15:guide>
+      </p15:sldGuideLst>
+    </p:ext>
+  </p:extLst>
 </p:presentation>
 </file>
 
@@ -292,7 +308,7 @@
           <a:p>
             <a:fld id="{5BCAD085-E8A6-8845-BD4E-CB4CCA059FC4}" type="datetimeFigureOut">
               <a:rPr lang="en-US" smtClean="0"/>
-              <a:t>1/27/13</a:t>
+              <a:t>4/30/2026</a:t>
             </a:fld>
             <a:endParaRPr lang="en-US"/>
           </a:p>
@@ -462,7 +478,7 @@
           <a:p>
             <a:fld id="{5BCAD085-E8A6-8845-BD4E-CB4CCA059FC4}" type="datetimeFigureOut">
               <a:rPr lang="en-US" smtClean="0"/>
-              <a:t>1/27/13</a:t>
+              <a:t>4/30/2026</a:t>
             </a:fld>
             <a:endParaRPr lang="en-US"/>
           </a:p>
@@ -642,7 +658,7 @@
           <a:p>
             <a:fld id="{5BCAD085-E8A6-8845-BD4E-CB4CCA059FC4}" type="datetimeFigureOut">
               <a:rPr lang="en-US" smtClean="0"/>
-              <a:t>1/27/13</a:t>
+              <a:t>4/30/2026</a:t>
             </a:fld>
             <a:endParaRPr lang="en-US"/>
           </a:p>
@@ -812,7 +828,7 @@
           <a:p>
             <a:fld id="{5BCAD085-E8A6-8845-BD4E-CB4CCA059FC4}" type="datetimeFigureOut">
               <a:rPr lang="en-US" smtClean="0"/>
-              <a:t>1/27/13</a:t>
+              <a:t>4/30/2026</a:t>
             </a:fld>
             <a:endParaRPr lang="en-US"/>
           </a:p>
@@ -1058,7 +1074,7 @@
           <a:p>
             <a:fld id="{5BCAD085-E8A6-8845-BD4E-CB4CCA059FC4}" type="datetimeFigureOut">
               <a:rPr lang="en-US" smtClean="0"/>
-              <a:t>1/27/13</a:t>
+              <a:t>4/30/2026</a:t>
             </a:fld>
             <a:endParaRPr lang="en-US"/>
           </a:p>
@@ -1346,7 +1362,7 @@
           <a:p>
             <a:fld id="{5BCAD085-E8A6-8845-BD4E-CB4CCA059FC4}" type="datetimeFigureOut">
               <a:rPr lang="en-US" smtClean="0"/>
-              <a:t>1/27/13</a:t>
+              <a:t>4/30/2026</a:t>
             </a:fld>
             <a:endParaRPr lang="en-US"/>
           </a:p>
@@ -1768,7 +1784,7 @@
           <a:p>
             <a:fld id="{5BCAD085-E8A6-8845-BD4E-CB4CCA059FC4}" type="datetimeFigureOut">
               <a:rPr lang="en-US" smtClean="0"/>
-              <a:t>1/27/13</a:t>
+              <a:t>4/30/2026</a:t>
             </a:fld>
             <a:endParaRPr lang="en-US"/>
           </a:p>
@@ -1886,7 +1902,7 @@
           <a:p>
             <a:fld id="{5BCAD085-E8A6-8845-BD4E-CB4CCA059FC4}" type="datetimeFigureOut">
               <a:rPr lang="en-US" smtClean="0"/>
-              <a:t>1/27/13</a:t>
+              <a:t>4/30/2026</a:t>
             </a:fld>
             <a:endParaRPr lang="en-US"/>
           </a:p>
@@ -1981,7 +1997,7 @@
           <a:p>
             <a:fld id="{5BCAD085-E8A6-8845-BD4E-CB4CCA059FC4}" type="datetimeFigureOut">
               <a:rPr lang="en-US" smtClean="0"/>
-              <a:t>1/27/13</a:t>
+              <a:t>4/30/2026</a:t>
             </a:fld>
             <a:endParaRPr lang="en-US"/>
           </a:p>
@@ -2258,7 +2274,7 @@
           <a:p>
             <a:fld id="{5BCAD085-E8A6-8845-BD4E-CB4CCA059FC4}" type="datetimeFigureOut">
               <a:rPr lang="en-US" smtClean="0"/>
-              <a:t>1/27/13</a:t>
+              <a:t>4/30/2026</a:t>
             </a:fld>
             <a:endParaRPr lang="en-US"/>
           </a:p>
@@ -2511,7 +2527,7 @@
           <a:p>
             <a:fld id="{5BCAD085-E8A6-8845-BD4E-CB4CCA059FC4}" type="datetimeFigureOut">
               <a:rPr lang="en-US" smtClean="0"/>
-              <a:t>1/27/13</a:t>
+              <a:t>4/30/2026</a:t>
             </a:fld>
             <a:endParaRPr lang="en-US"/>
           </a:p>
@@ -2724,7 +2740,7 @@
           <a:p>
             <a:fld id="{5BCAD085-E8A6-8845-BD4E-CB4CCA059FC4}" type="datetimeFigureOut">
               <a:rPr lang="en-US" smtClean="0"/>
-              <a:t>1/27/13</a:t>
+              <a:t>4/30/2026</a:t>
             </a:fld>
             <a:endParaRPr lang="en-US"/>
           </a:p>
@@ -3083,7 +3099,7 @@
 </file>
 
 <file path=ppt/slides/slide1.xml><?xml version="1.0" encoding="utf-8"?>
-<p:sld xmlns:a="http://schemas.openxmlformats.org/drawingml/2006/main" xmlns:p="http://schemas.openxmlformats.org/presentationml/2006/main" xmlns:r="http://schemas.openxmlformats.org/officeDocument/2006/relationships">
+<p:sld xmlns:a="http://schemas.openxmlformats.org/drawingml/2006/main" xmlns:r="http://schemas.openxmlformats.org/officeDocument/2006/relationships" xmlns:p="http://schemas.openxmlformats.org/presentationml/2006/main">
   <p:cSld>
     <p:spTree>
       <p:nvGrpSpPr>
@@ -3091,7 +3107,14 @@
         <p:cNvGrpSpPr/>
         <p:nvPr/>
       </p:nvGrpSpPr>
-      <p:grpSpPr/>
+      <p:grpSpPr>
+        <a:xfrm>
+          <a:off x="0" y="0"/>
+          <a:ext cx="0" cy="0"/>
+          <a:chOff x="0" y="0"/>
+          <a:chExt cx="0" cy="0"/>
+        </a:xfrm>
+      </p:grpSpPr>
       <p:sp>
         <p:nvSpPr>
           <p:cNvPr id="2" name="Title 1"/>
@@ -3106,7 +3129,9 @@
         <p:txBody>
           <a:bodyPr/>
           <a:lstStyle/>
-          <a:p/>
+          <a:p>
+            <a:endParaRPr/>
+          </a:p>
         </p:txBody>
       </p:sp>
       <p:sp>
@@ -3126,61 +3151,22 @@
           </a:xfrm>
         </p:spPr>
         <p:txBody>
-          <a:bodyPr wrap="square" anchor="t" lIns="360000" rIns="360000" tIns="46800" bIns="46800">
+          <a:bodyPr wrap="square" lIns="360000" tIns="46800" rIns="360000" bIns="46800" anchor="t">
             <a:noAutofit/>
           </a:bodyPr>
           <a:lstStyle/>
           <a:p>
-            <a:pPr algn="ctr" marL="0" indent="0">
-              <a:buNone/>
-              <a:lnSpc>
-                <a:spcPct val="115000"/>
-              </a:lnSpc>
+            <a:pPr marL="0" indent="0" algn="ctr">
+              <a:buNone/>
             </a:pPr>
             <a:r>
               <a:rPr sz="2200" b="0" i="0">
                 <a:latin typeface="Bookman Old Style"/>
               </a:rPr>
-              <a:t>marp: true</a:t>
-            </a:r>
-            <a:r>
-              <a:rPr sz="2200" b="0" i="0">
-                <a:latin typeface="Bookman Old Style"/>
-              </a:rPr>
-              <a:t>
-</a:t>
-            </a:r>
-            <a:r>
-              <a:rPr sz="2200" b="0" i="0">
-                <a:latin typeface="Bookman Old Style"/>
-              </a:rPr>
-              <a:t>theme: default</a:t>
-            </a:r>
-            <a:r>
-              <a:rPr sz="2200" b="0" i="0">
-                <a:latin typeface="Bookman Old Style"/>
-              </a:rPr>
-              <a:t>
-</a:t>
-            </a:r>
-            <a:r>
-              <a:rPr sz="2200" b="0" i="0">
-                <a:latin typeface="Bookman Old Style"/>
-              </a:rPr>
-              <a:t>paginate: true</a:t>
-            </a:r>
-            <a:r>
-              <a:rPr sz="2200" b="0" i="0">
-                <a:latin typeface="Bookman Old Style"/>
-              </a:rPr>
-              <a:t>
-</a:t>
-            </a:r>
-            <a:r>
-              <a:rPr sz="2200" b="0" i="0">
-                <a:latin typeface="Bookman Old Style"/>
-              </a:rPr>
-              <a:t>backgroundColor: #fff</a:t>
+              <a:t>marp: true
+theme: default
+paginate: true
+backgroundColor: #fff</a:t>
             </a:r>
           </a:p>
         </p:txBody>
@@ -3270,7 +3256,7 @@
 </file>
 
 <file path=ppt/slides/slide2.xml><?xml version="1.0" encoding="utf-8"?>
-<p:sld xmlns:a="http://schemas.openxmlformats.org/drawingml/2006/main" xmlns:p="http://schemas.openxmlformats.org/presentationml/2006/main" xmlns:r="http://schemas.openxmlformats.org/officeDocument/2006/relationships">
+<p:sld xmlns:a="http://schemas.openxmlformats.org/drawingml/2006/main" xmlns:r="http://schemas.openxmlformats.org/officeDocument/2006/relationships" xmlns:p="http://schemas.openxmlformats.org/presentationml/2006/main">
   <p:cSld>
     <p:spTree>
       <p:nvGrpSpPr>
@@ -3278,7 +3264,14 @@
         <p:cNvGrpSpPr/>
         <p:nvPr/>
       </p:nvGrpSpPr>
-      <p:grpSpPr/>
+      <p:grpSpPr>
+        <a:xfrm>
+          <a:off x="0" y="0"/>
+          <a:ext cx="0" cy="0"/>
+          <a:chOff x="0" y="0"/>
+          <a:chExt cx="0" cy="0"/>
+        </a:xfrm>
+      </p:grpSpPr>
       <p:sp>
         <p:nvSpPr>
           <p:cNvPr id="2" name="Title 1"/>
@@ -3299,7 +3292,7 @@
           </a:solidFill>
         </p:spPr>
         <p:txBody>
-          <a:bodyPr wrap="square" anchor="ctr" lIns="0" rIns="0" tIns="46800" bIns="46800">
+          <a:bodyPr wrap="square" lIns="0" tIns="46800" rIns="0" bIns="46800" anchor="ctr">
             <a:spAutoFit/>
           </a:bodyPr>
           <a:lstStyle/>
@@ -3333,16 +3326,13 @@
           </a:xfrm>
         </p:spPr>
         <p:txBody>
-          <a:bodyPr wrap="square" anchor="t" lIns="360000" rIns="360000" tIns="46800" bIns="46800">
+          <a:bodyPr wrap="square" lIns="360000" tIns="46800" rIns="360000" bIns="46800" anchor="t">
             <a:noAutofit/>
           </a:bodyPr>
           <a:lstStyle/>
           <a:p>
             <a:pPr marL="0" indent="0">
               <a:buNone/>
-              <a:lnSpc>
-                <a:spcPct val="115000"/>
-              </a:lnSpc>
             </a:pPr>
             <a:r>
               <a:rPr sz="2200" b="1" i="0">
@@ -3354,13 +3344,7 @@
               <a:rPr sz="2200" b="0" i="0">
                 <a:latin typeface="Bookman Old Style"/>
               </a:rPr>
-              <a:t> Искусственный Интеллект</a:t>
-            </a:r>
-            <a:r>
-              <a:rPr sz="2200" b="0" i="0">
-                <a:latin typeface="Bookman Old Style"/>
-              </a:rPr>
-              <a:t>
+              <a:t> Искусственный Интеллект
 </a:t>
             </a:r>
             <a:r>
@@ -3463,7 +3447,7 @@
 </file>
 
 <file path=ppt/slides/slide3.xml><?xml version="1.0" encoding="utf-8"?>
-<p:sld xmlns:a="http://schemas.openxmlformats.org/drawingml/2006/main" xmlns:p="http://schemas.openxmlformats.org/presentationml/2006/main" xmlns:r="http://schemas.openxmlformats.org/officeDocument/2006/relationships">
+<p:sld xmlns:a="http://schemas.openxmlformats.org/drawingml/2006/main" xmlns:r="http://schemas.openxmlformats.org/officeDocument/2006/relationships" xmlns:p="http://schemas.openxmlformats.org/presentationml/2006/main">
   <p:cSld>
     <p:spTree>
       <p:nvGrpSpPr>
@@ -3471,7 +3455,14 @@
         <p:cNvGrpSpPr/>
         <p:nvPr/>
       </p:nvGrpSpPr>
-      <p:grpSpPr/>
+      <p:grpSpPr>
+        <a:xfrm>
+          <a:off x="0" y="0"/>
+          <a:ext cx="0" cy="0"/>
+          <a:chOff x="0" y="0"/>
+          <a:chExt cx="0" cy="0"/>
+        </a:xfrm>
+      </p:grpSpPr>
       <p:sp>
         <p:nvSpPr>
           <p:cNvPr id="2" name="Title 1"/>
@@ -3492,7 +3483,7 @@
           </a:solidFill>
         </p:spPr>
         <p:txBody>
-          <a:bodyPr wrap="square" anchor="ctr" lIns="0" rIns="0" tIns="46800" bIns="46800">
+          <a:bodyPr wrap="square" lIns="0" tIns="46800" rIns="0" bIns="46800" anchor="ctr">
             <a:spAutoFit/>
           </a:bodyPr>
           <a:lstStyle/>
@@ -3509,396 +3500,824 @@
           </a:p>
         </p:txBody>
       </p:sp>
-      <p:sp>
-        <p:nvSpPr>
-          <p:cNvPr id="3" name="Content Placeholder 2"/>
-          <p:cNvSpPr>
-            <a:spLocks noGrp="1"/>
-          </p:cNvSpPr>
-          <p:nvPr>
-            <p:ph idx="1"/>
-          </p:nvPr>
-        </p:nvSpPr>
-        <p:spPr>
-          <a:xfrm>
-            <a:off x="0" y="432000"/>
-            <a:ext cx="12192000" cy="5994000"/>
-          </a:xfrm>
-        </p:spPr>
-        <p:txBody>
-          <a:bodyPr wrap="square" anchor="t" lIns="360000" rIns="360000" tIns="46800" bIns="46800">
-            <a:noAutofit/>
-          </a:bodyPr>
-          <a:lstStyle/>
-          <a:p>
-            <a:pPr marL="0" indent="0">
-              <a:buNone/>
-              <a:lnSpc>
-                <a:spcPct val="115000"/>
-              </a:lnSpc>
-            </a:pPr>
-            <a:r>
-              <a:rPr sz="2200" b="0" i="0">
-                <a:latin typeface="Bookman Old Style"/>
-              </a:rPr>
-              <a:t>Мы ищем минимум функции потерь </a:t>
-            </a:r>
-            <ns0:m xmlns:ns0="http://schemas.microsoft.com/office/drawing/2010/main">
-              <m:oMathPara xmlns:m="http://schemas.openxmlformats.org/officeDocument/2006/math">
-                <m:oMath xmlns:mml="http://www.w3.org/1998/Math/MathML">
-                  <m:r>
-                    <a:rPr sz="2200">
-                      <a:latin typeface="Cambria Math"/>
-                    </a:rPr>
-                    <a:rPr sz="2200">
-                      <a:latin typeface="Cambria Math"/>
-                    </a:rPr>
-                    <m:t>J(θ)</m:t>
-                  </m:r>
-                </m:oMath>
-              </m:oMathPara>
-            </ns0:m>
-            <a:r>
-              <a:rPr sz="2200" b="0" i="0">
-                <a:latin typeface="Bookman Old Style"/>
-              </a:rPr>
-              <a:t>, которая определяет ошибку предсказания модели. Наша цель — найти такие параметры </a:t>
-            </a:r>
-            <ns0:m xmlns:ns0="http://schemas.microsoft.com/office/drawing/2010/main">
-              <m:oMathPara xmlns:m="http://schemas.openxmlformats.org/officeDocument/2006/math">
-                <m:oMath xmlns:mml="http://www.w3.org/1998/Math/MathML">
-                  <m:r>
-                    <a:rPr sz="2200">
-                      <a:latin typeface="Cambria Math"/>
-                    </a:rPr>
-                    <a:rPr sz="2200">
-                      <a:latin typeface="Cambria Math"/>
-                    </a:rPr>
-                    <m:t>θ</m:t>
-                  </m:r>
-                </m:oMath>
-              </m:oMathPara>
-            </ns0:m>
-            <a:r>
-              <a:rPr sz="2200" b="0" i="0">
-                <a:latin typeface="Bookman Old Style"/>
-              </a:rPr>
-              <a:t>, при которых значение функции минимально:</a:t>
-            </a:r>
-          </a:p>
-          <a:p>
-            <a:pPr marL="0" indent="0">
-              <a:buNone/>
-              <a:lnSpc>
-                <a:spcPct val="115000"/>
-              </a:lnSpc>
-            </a:pPr>
-            <ns0:m xmlns:ns0="http://schemas.microsoft.com/office/drawing/2010/main">
-              <m:oMathPara xmlns:m="http://schemas.openxmlformats.org/officeDocument/2006/math">
-                <m:oMath xmlns:mml="http://www.w3.org/1998/Math/MathML">
-                  <m:sSup>
-                    <m:e>
+      <mc:AlternateContent xmlns:mc="http://schemas.openxmlformats.org/markup-compatibility/2006">
+        <mc:Choice xmlns:a14="http://schemas.microsoft.com/office/drawing/2010/main" Requires="a14">
+          <p:sp>
+            <p:nvSpPr>
+              <p:cNvPr id="3" name="Content Placeholder 2"/>
+              <p:cNvSpPr>
+                <a:spLocks noGrp="1"/>
+              </p:cNvSpPr>
+              <p:nvPr>
+                <p:ph idx="1"/>
+              </p:nvPr>
+            </p:nvSpPr>
+            <p:spPr>
+              <a:xfrm>
+                <a:off x="0" y="432000"/>
+                <a:ext cx="12192000" cy="5994000"/>
+              </a:xfrm>
+            </p:spPr>
+            <p:txBody>
+              <a:bodyPr wrap="square" lIns="360000" tIns="46800" rIns="360000" bIns="46800" anchor="t">
+                <a:noAutofit/>
+              </a:bodyPr>
+              <a:lstStyle/>
+              <a:p>
+                <a:pPr marL="0" indent="0">
+                  <a:buNone/>
+                </a:pPr>
+                <a:r>
+                  <a:rPr lang="ru-RU" sz="2200" b="0" i="0" dirty="0" smtClean="0">
+                    <a:latin typeface="Bookman Old Style"/>
+                  </a:rPr>
+                  <a:t>Мы</a:t>
+                </a:r>
+                <a:r>
+                  <a:rPr lang="ru-RU" sz="2200" b="0" i="0" dirty="0">
+                    <a:latin typeface="Bookman Old Style"/>
+                  </a:rPr>
+                  <a:t> </a:t>
+                </a:r>
+                <a:r>
+                  <a:rPr lang="ru-RU" sz="2200" b="0" i="0" dirty="0" err="1">
+                    <a:latin typeface="Bookman Old Style"/>
+                  </a:rPr>
+                  <a:t>ищем</a:t>
+                </a:r>
+                <a:r>
+                  <a:rPr lang="ru-RU" sz="2200" b="0" i="0" dirty="0">
+                    <a:latin typeface="Bookman Old Style"/>
+                  </a:rPr>
+                  <a:t> </a:t>
+                </a:r>
+                <a:r>
+                  <a:rPr lang="ru-RU" sz="2200" b="0" i="0" dirty="0" err="1">
+                    <a:latin typeface="Bookman Old Style"/>
+                  </a:rPr>
+                  <a:t>минимум</a:t>
+                </a:r>
+                <a:r>
+                  <a:rPr lang="ru-RU" sz="2200" b="0" i="0" dirty="0">
+                    <a:latin typeface="Bookman Old Style"/>
+                  </a:rPr>
+                  <a:t> </a:t>
+                </a:r>
+                <a:r>
+                  <a:rPr lang="ru-RU" sz="2200" b="0" i="0" dirty="0" err="1">
+                    <a:latin typeface="Bookman Old Style"/>
+                  </a:rPr>
+                  <a:t>функции</a:t>
+                </a:r>
+                <a:r>
+                  <a:rPr lang="ru-RU" sz="2200" b="0" i="0" dirty="0">
+                    <a:latin typeface="Bookman Old Style"/>
+                  </a:rPr>
+                  <a:t> </a:t>
+                </a:r>
+                <a:r>
+                  <a:rPr lang="ru-RU" sz="2200" b="0" i="0" dirty="0" err="1">
+                    <a:latin typeface="Bookman Old Style"/>
+                  </a:rPr>
+                  <a:t>потерь</a:t>
+                </a:r>
+                <a:r>
+                  <a:rPr lang="ru-RU" sz="2200" b="0" i="0" dirty="0">
+                    <a:latin typeface="Bookman Old Style"/>
+                  </a:rPr>
+                  <a:t> </a:t>
+                </a:r>
+                <a14:m>
+                  <m:oMath xmlns:m="http://schemas.openxmlformats.org/officeDocument/2006/math">
+                    <m:r>
+                      <a:rPr lang="ru-RU" sz="2200">
+                        <a:latin typeface="Cambria Math"/>
+                      </a:rPr>
+                      <m:t>𝐽</m:t>
+                    </m:r>
+                    <m:r>
+                      <a:rPr lang="ru-RU" sz="2200">
+                        <a:latin typeface="Cambria Math"/>
+                      </a:rPr>
+                      <m:t>(</m:t>
+                    </m:r>
+                    <m:r>
+                      <a:rPr lang="ru-RU" sz="2200">
+                        <a:latin typeface="Cambria Math"/>
+                      </a:rPr>
+                      <m:t>𝜃</m:t>
+                    </m:r>
+                    <m:r>
+                      <a:rPr lang="ru-RU" sz="2200">
+                        <a:latin typeface="Cambria Math"/>
+                      </a:rPr>
+                      <m:t>)</m:t>
+                    </m:r>
+                  </m:oMath>
+                </a14:m>
+                <a:r>
+                  <a:rPr lang="ru-RU" sz="2200" b="0" i="0" dirty="0">
+                    <a:latin typeface="Bookman Old Style"/>
+                  </a:rPr>
+                  <a:t>, </a:t>
+                </a:r>
+                <a:r>
+                  <a:rPr lang="ru-RU" sz="2200" b="0" i="0" dirty="0" err="1">
+                    <a:latin typeface="Bookman Old Style"/>
+                  </a:rPr>
+                  <a:t>которая</a:t>
+                </a:r>
+                <a:r>
+                  <a:rPr lang="ru-RU" sz="2200" b="0" i="0" dirty="0">
+                    <a:latin typeface="Bookman Old Style"/>
+                  </a:rPr>
+                  <a:t> </a:t>
+                </a:r>
+                <a:r>
+                  <a:rPr lang="ru-RU" sz="2200" b="0" i="0" dirty="0" err="1">
+                    <a:latin typeface="Bookman Old Style"/>
+                  </a:rPr>
+                  <a:t>определяет</a:t>
+                </a:r>
+                <a:r>
+                  <a:rPr lang="ru-RU" sz="2200" b="0" i="0" dirty="0">
+                    <a:latin typeface="Bookman Old Style"/>
+                  </a:rPr>
+                  <a:t> </a:t>
+                </a:r>
+                <a:r>
+                  <a:rPr lang="ru-RU" sz="2200" b="0" i="0" dirty="0" err="1">
+                    <a:latin typeface="Bookman Old Style"/>
+                  </a:rPr>
+                  <a:t>ошибку</a:t>
+                </a:r>
+                <a:r>
+                  <a:rPr lang="ru-RU" sz="2200" b="0" i="0" dirty="0">
+                    <a:latin typeface="Bookman Old Style"/>
+                  </a:rPr>
+                  <a:t> </a:t>
+                </a:r>
+                <a:r>
+                  <a:rPr lang="ru-RU" sz="2200" b="0" i="0" dirty="0" err="1">
+                    <a:latin typeface="Bookman Old Style"/>
+                  </a:rPr>
+                  <a:t>предсказания</a:t>
+                </a:r>
+                <a:r>
+                  <a:rPr lang="ru-RU" sz="2200" b="0" i="0" dirty="0">
+                    <a:latin typeface="Bookman Old Style"/>
+                  </a:rPr>
+                  <a:t> </a:t>
+                </a:r>
+                <a:r>
+                  <a:rPr lang="ru-RU" sz="2200" b="0" i="0" dirty="0" err="1">
+                    <a:latin typeface="Bookman Old Style"/>
+                  </a:rPr>
+                  <a:t>модели</a:t>
+                </a:r>
+                <a:r>
+                  <a:rPr lang="ru-RU" sz="2200" b="0" i="0" dirty="0">
+                    <a:latin typeface="Bookman Old Style"/>
+                  </a:rPr>
+                  <a:t>. </a:t>
+                </a:r>
+                <a:r>
+                  <a:rPr lang="ru-RU" sz="2200" b="0" i="0" dirty="0" err="1">
+                    <a:latin typeface="Bookman Old Style"/>
+                  </a:rPr>
+                  <a:t>Наша</a:t>
+                </a:r>
+                <a:r>
+                  <a:rPr lang="ru-RU" sz="2200" b="0" i="0" dirty="0">
+                    <a:latin typeface="Bookman Old Style"/>
+                  </a:rPr>
+                  <a:t> </a:t>
+                </a:r>
+                <a:r>
+                  <a:rPr lang="ru-RU" sz="2200" b="0" i="0" dirty="0" err="1">
+                    <a:latin typeface="Bookman Old Style"/>
+                  </a:rPr>
+                  <a:t>цель</a:t>
+                </a:r>
+                <a:r>
+                  <a:rPr lang="ru-RU" sz="2200" b="0" i="0" dirty="0">
+                    <a:latin typeface="Bookman Old Style"/>
+                  </a:rPr>
+                  <a:t> — </a:t>
+                </a:r>
+                <a:r>
+                  <a:rPr lang="ru-RU" sz="2200" b="0" i="0" dirty="0" err="1">
+                    <a:latin typeface="Bookman Old Style"/>
+                  </a:rPr>
+                  <a:t>найти</a:t>
+                </a:r>
+                <a:r>
+                  <a:rPr lang="ru-RU" sz="2200" b="0" i="0" dirty="0">
+                    <a:latin typeface="Bookman Old Style"/>
+                  </a:rPr>
+                  <a:t> </a:t>
+                </a:r>
+                <a:r>
+                  <a:rPr lang="ru-RU" sz="2200" b="0" i="0" dirty="0" err="1">
+                    <a:latin typeface="Bookman Old Style"/>
+                  </a:rPr>
+                  <a:t>такие</a:t>
+                </a:r>
+                <a:r>
+                  <a:rPr lang="ru-RU" sz="2200" b="0" i="0" dirty="0">
+                    <a:latin typeface="Bookman Old Style"/>
+                  </a:rPr>
+                  <a:t> </a:t>
+                </a:r>
+                <a:r>
+                  <a:rPr lang="ru-RU" sz="2200" b="0" i="0" dirty="0" err="1">
+                    <a:latin typeface="Bookman Old Style"/>
+                  </a:rPr>
+                  <a:t>параметры</a:t>
+                </a:r>
+                <a:r>
+                  <a:rPr lang="ru-RU" sz="2200" b="0" i="0" dirty="0">
+                    <a:latin typeface="Bookman Old Style"/>
+                  </a:rPr>
+                  <a:t> </a:t>
+                </a:r>
+                <a14:m>
+                  <m:oMath xmlns:m="http://schemas.openxmlformats.org/officeDocument/2006/math">
+                    <m:r>
+                      <a:rPr lang="ru-RU" sz="2200">
+                        <a:latin typeface="Cambria Math"/>
+                      </a:rPr>
+                      <m:t>𝜃</m:t>
+                    </m:r>
+                  </m:oMath>
+                </a14:m>
+                <a:r>
+                  <a:rPr lang="ru-RU" sz="2200" b="0" i="0" dirty="0">
+                    <a:latin typeface="Bookman Old Style"/>
+                  </a:rPr>
+                  <a:t>, </a:t>
+                </a:r>
+                <a:r>
+                  <a:rPr lang="ru-RU" sz="2200" b="0" i="0" dirty="0" err="1">
+                    <a:latin typeface="Bookman Old Style"/>
+                  </a:rPr>
+                  <a:t>при</a:t>
+                </a:r>
+                <a:r>
+                  <a:rPr lang="ru-RU" sz="2200" b="0" i="0" dirty="0">
+                    <a:latin typeface="Bookman Old Style"/>
+                  </a:rPr>
+                  <a:t> </a:t>
+                </a:r>
+                <a:r>
+                  <a:rPr lang="ru-RU" sz="2200" b="0" i="0" dirty="0" err="1">
+                    <a:latin typeface="Bookman Old Style"/>
+                  </a:rPr>
+                  <a:t>которых</a:t>
+                </a:r>
+                <a:r>
+                  <a:rPr lang="ru-RU" sz="2200" b="0" i="0" dirty="0">
+                    <a:latin typeface="Bookman Old Style"/>
+                  </a:rPr>
+                  <a:t> </a:t>
+                </a:r>
+                <a:r>
+                  <a:rPr lang="ru-RU" sz="2200" b="0" i="0" dirty="0" err="1">
+                    <a:latin typeface="Bookman Old Style"/>
+                  </a:rPr>
+                  <a:t>значение</a:t>
+                </a:r>
+                <a:r>
+                  <a:rPr lang="ru-RU" sz="2200" b="0" i="0" dirty="0">
+                    <a:latin typeface="Bookman Old Style"/>
+                  </a:rPr>
+                  <a:t> </a:t>
+                </a:r>
+                <a:r>
+                  <a:rPr lang="ru-RU" sz="2200" b="0" i="0" dirty="0" err="1">
+                    <a:latin typeface="Bookman Old Style"/>
+                  </a:rPr>
+                  <a:t>функции</a:t>
+                </a:r>
+                <a:r>
+                  <a:rPr lang="ru-RU" sz="2200" b="0" i="0" dirty="0">
+                    <a:latin typeface="Bookman Old Style"/>
+                  </a:rPr>
+                  <a:t> </a:t>
+                </a:r>
+                <a:r>
+                  <a:rPr lang="ru-RU" sz="2200" b="0" i="0" dirty="0" err="1">
+                    <a:latin typeface="Bookman Old Style"/>
+                  </a:rPr>
+                  <a:t>минимально</a:t>
+                </a:r>
+                <a:r>
+                  <a:rPr lang="ru-RU" sz="2200" b="0" i="0" dirty="0">
+                    <a:latin typeface="Bookman Old Style"/>
+                  </a:rPr>
+                  <a:t>:</a:t>
+                </a:r>
+              </a:p>
+              <a:p>
+                <a:pPr marL="0" indent="0">
+                  <a:buNone/>
+                </a:pPr>
+                <a14:m>
+                  <m:oMathPara xmlns:m="http://schemas.openxmlformats.org/officeDocument/2006/math">
+                    <m:oMathParaPr>
+                      <m:jc m:val="centerGroup"/>
+                    </m:oMathParaPr>
+                    <m:oMath xmlns:m="http://schemas.openxmlformats.org/officeDocument/2006/math">
+                      <m:sSup>
+                        <m:sSupPr>
+                          <m:ctrlPr>
+                            <a:rPr lang="ar-AE" sz="2200">
+                              <a:latin typeface="Cambria Math" panose="02040503050406030204" pitchFamily="18" charset="0"/>
+                            </a:rPr>
+                          </m:ctrlPr>
+                        </m:sSupPr>
+                        <m:e>
+                          <m:r>
+                            <a:rPr lang="ar-AE" sz="2200">
+                              <a:latin typeface="Cambria Math"/>
+                            </a:rPr>
+                            <m:t>𝜃</m:t>
+                          </m:r>
+                        </m:e>
+                        <m:sup>
+                          <m:r>
+                            <a:rPr lang="ar-AE" sz="2200">
+                              <a:latin typeface="Cambria Math"/>
+                            </a:rPr>
+                            <m:t>∗</m:t>
+                          </m:r>
+                        </m:sup>
+                      </m:sSup>
                       <m:r>
-                        <a:rPr sz="2200">
+                        <a:rPr lang="ar-AE" sz="2200">
                           <a:latin typeface="Cambria Math"/>
                         </a:rPr>
-                        <a:rPr sz="2200">
+                        <m:t>=</m:t>
+                      </m:r>
+                      <m:r>
+                        <a:rPr lang="ar-AE" sz="2200" b="0" i="0" smtClean="0">
+                          <a:latin typeface="Cambria Math" panose="02040503050406030204" pitchFamily="18" charset="0"/>
+                        </a:rPr>
+                        <m:t> </m:t>
+                      </m:r>
+                      <m:r>
+                        <a:rPr lang="ar-AE" sz="2200">
                           <a:latin typeface="Cambria Math"/>
                         </a:rPr>
-                        <m:t>θ</m:t>
+                        <m:t>\</m:t>
                       </m:r>
-                    </m:e>
-                    <m:sup>
                       <m:r>
-                        <a:rPr sz="2200">
+                        <m:rPr>
+                          <m:sty m:val="p"/>
+                        </m:rPr>
+                        <a:rPr lang="en-US" sz="2200">
                           <a:latin typeface="Cambria Math"/>
                         </a:rPr>
-                        <a:rPr sz="2200">
+                        <m:t>arg</m:t>
+                      </m:r>
+                      <m:sSub>
+                        <m:sSubPr>
+                          <m:ctrlPr>
+                            <a:rPr lang="ar-AE" sz="2200" i="1">
+                              <a:latin typeface="Cambria Math" panose="02040503050406030204" pitchFamily="18" charset="0"/>
+                            </a:rPr>
+                          </m:ctrlPr>
+                        </m:sSubPr>
+                        <m:e>
+                          <m:r>
+                            <a:rPr lang="ar-AE" sz="2200">
+                              <a:latin typeface="Cambria Math"/>
+                            </a:rPr>
+                            <m:t>𝑚𝑖𝑛</m:t>
+                          </m:r>
+                        </m:e>
+                        <m:sub>
+                          <m:r>
+                            <a:rPr lang="ar-AE" sz="2200">
+                              <a:latin typeface="Cambria Math"/>
+                            </a:rPr>
+                            <m:t>𝜃</m:t>
+                          </m:r>
+                        </m:sub>
+                      </m:sSub>
+                      <m:r>
+                        <a:rPr lang="ar-AE" sz="2200">
                           <a:latin typeface="Cambria Math"/>
                         </a:rPr>
-                        <m:t>*</m:t>
+                        <m:t>𝐽</m:t>
                       </m:r>
-                    </m:sup>
-                  </m:sSup>
-                  <m:r>
-                    <a:rPr sz="2200">
-                      <a:latin typeface="Cambria Math"/>
-                    </a:rPr>
-                    <a:rPr sz="2200">
-                      <a:latin typeface="Cambria Math"/>
-                    </a:rPr>
-                    <m:t>=</m:t>
-                  </m:r>
-                  <m:r>
-                    <a:rPr sz="2200">
-                      <a:latin typeface="Cambria Math"/>
-                    </a:rPr>
-                    <a:rPr sz="2200">
-                      <a:latin typeface="Cambria Math"/>
-                    </a:rPr>
-                    <m:rPr>
-                      <m:sty m:val="p"/>
-                    </m:rPr>
-                    <m:t>\arg</m:t>
-                  </m:r>
-                  <m:sSub>
-                    <m:e>
                       <m:r>
-                        <a:rPr sz="2200">
-                          <a:latin typeface="Cambria Math"/>
-                        </a:rPr>
-                        <a:rPr sz="2200">
-                          <a:latin typeface="Cambria Math"/>
-                        </a:rPr>
-                        <m:t>min</m:t>
-                      </m:r>
-                    </m:e>
-                    <m:sub>
-                      <m:r>
-                        <a:rPr sz="2200">
-                          <a:latin typeface="Cambria Math"/>
-                        </a:rPr>
-                        <a:rPr sz="2200">
-                          <a:latin typeface="Cambria Math"/>
-                        </a:rPr>
-                        <m:t>θ</m:t>
-                      </m:r>
-                    </m:sub>
-                  </m:sSub>
-                  <m:r>
-                    <a:rPr sz="2200">
-                      <a:latin typeface="Cambria Math"/>
-                    </a:rPr>
-                    <a:rPr sz="2200">
-                      <a:latin typeface="Cambria Math"/>
-                    </a:rPr>
-                    <m:t>J(θ)</m:t>
-                  </m:r>
-                </m:oMath>
-              </m:oMathPara>
-            </ns0:m>
-          </a:p>
-          <a:p>
-            <a:pPr marL="0" indent="0">
-              <a:buNone/>
-              <a:lnSpc>
-                <a:spcPct val="115000"/>
-              </a:lnSpc>
-            </a:pPr>
-            <a:r>
-              <a:rPr sz="2200" b="0" i="0">
-                <a:latin typeface="Bookman Old Style"/>
-              </a:rPr>
-              <a:t>Для линейной регрессии функция потерь (MSE) выглядит так:</a:t>
-            </a:r>
-            <a:r>
-              <a:rPr sz="2200" b="0" i="0">
-                <a:latin typeface="Bookman Old Style"/>
-              </a:rPr>
-              <a:t>
-</a:t>
-            </a:r>
-            <ns0:m xmlns:ns0="http://schemas.microsoft.com/office/drawing/2010/main">
-              <m:oMathPara xmlns:m="http://schemas.openxmlformats.org/officeDocument/2006/math">
-                <m:oMath xmlns:mml="http://www.w3.org/1998/Math/MathML">
-                  <m:r>
-                    <a:rPr sz="2200">
-                      <a:latin typeface="Cambria Math"/>
-                    </a:rPr>
-                    <a:rPr sz="2200">
-                      <a:latin typeface="Cambria Math"/>
-                    </a:rPr>
-                    <m:t>J(θ)=</m:t>
-                  </m:r>
-                  <m:f>
-                    <m:fPr>
-                      <m:type m:val="bar"/>
-                    </m:fPr>
-                    <m:num>
-                      <m:r>
-                        <a:rPr sz="2200">
-                          <a:latin typeface="Cambria Math"/>
-                        </a:rPr>
-                        <a:rPr sz="2200">
-                          <a:latin typeface="Cambria Math"/>
-                        </a:rPr>
-                        <m:t>1</m:t>
-                      </m:r>
-                    </m:num>
-                    <m:den>
-                      <m:r>
-                        <a:rPr sz="2200">
-                          <a:latin typeface="Cambria Math"/>
-                        </a:rPr>
-                        <a:rPr sz="2200">
-                          <a:latin typeface="Cambria Math"/>
-                        </a:rPr>
-                        <m:t>2m</m:t>
-                      </m:r>
-                    </m:den>
-                  </m:f>
-                  <m:nary>
-                    <m:naryPr>
-                      <m:chr m:val="∑"/>
-                      <m:limLoc m:val="subSup"/>
-                      <m:grow m:val="1"/>
-                      <m:subHide m:val="off"/>
-                      <m:supHide m:val="off"/>
-                    </m:naryPr>
-                    <m:sub>
-                      <m:r>
-                        <a:rPr sz="2200">
-                          <a:latin typeface="Cambria Math"/>
-                        </a:rPr>
-                        <a:rPr sz="2200">
-                          <a:latin typeface="Cambria Math"/>
-                        </a:rPr>
-                        <m:t>i=1</m:t>
-                      </m:r>
-                    </m:sub>
-                    <m:sup>
-                      <m:r>
-                        <a:rPr sz="2200">
-                          <a:latin typeface="Cambria Math"/>
-                        </a:rPr>
-                        <a:rPr sz="2200">
-                          <a:latin typeface="Cambria Math"/>
-                        </a:rPr>
-                        <m:t>m</m:t>
-                      </m:r>
-                    </m:sup>
-                    <m:e>
-                      <m:r>
-                        <a:rPr sz="2200">
-                          <a:latin typeface="Cambria Math"/>
-                        </a:rPr>
-                        <a:rPr sz="2200">
+                        <a:rPr lang="ar-AE" sz="2200">
                           <a:latin typeface="Cambria Math"/>
                         </a:rPr>
                         <m:t>(</m:t>
                       </m:r>
-                      <m:sSub>
-                        <m:e>
-                          <m:r>
-                            <a:rPr sz="2200">
-                              <a:latin typeface="Cambria Math"/>
-                            </a:rPr>
-                            <a:rPr sz="2200">
-                              <a:latin typeface="Cambria Math"/>
-                            </a:rPr>
-                            <m:t>h</m:t>
-                          </m:r>
-                        </m:e>
-                        <m:sub>
-                          <m:r>
-                            <a:rPr sz="2200">
-                              <a:latin typeface="Cambria Math"/>
-                            </a:rPr>
-                            <a:rPr sz="2200">
-                              <a:latin typeface="Cambria Math"/>
-                            </a:rPr>
-                            <m:t>θ</m:t>
-                          </m:r>
-                        </m:sub>
-                      </m:sSub>
                       <m:r>
-                        <a:rPr sz="2200">
+                        <a:rPr lang="ar-AE" sz="2200">
                           <a:latin typeface="Cambria Math"/>
                         </a:rPr>
-                        <a:rPr sz="2200">
+                        <m:t>𝜃</m:t>
+                      </m:r>
+                      <m:r>
+                        <a:rPr lang="ar-AE" sz="2200">
                           <a:latin typeface="Cambria Math"/>
                         </a:rPr>
-                        <m:t>(</m:t>
+                        <m:t>)</m:t>
                       </m:r>
-                      <m:sSup>
-                        <m:e>
-                          <m:r>
-                            <a:rPr sz="2200">
-                              <a:latin typeface="Cambria Math"/>
-                            </a:rPr>
-                            <a:rPr sz="2200">
-                              <a:latin typeface="Cambria Math"/>
-                            </a:rPr>
-                            <m:t>x</m:t>
-                          </m:r>
-                        </m:e>
-                        <m:sup>
-                          <m:r>
-                            <a:rPr sz="2200">
-                              <a:latin typeface="Cambria Math"/>
-                            </a:rPr>
-                            <a:rPr sz="2200">
-                              <a:latin typeface="Cambria Math"/>
-                            </a:rPr>
-                            <m:t>(i)</m:t>
-                          </m:r>
-                        </m:sup>
-                      </m:sSup>
-                      <m:r>
-                        <a:rPr sz="2200">
-                          <a:latin typeface="Cambria Math"/>
-                        </a:rPr>
-                        <a:rPr sz="2200">
-                          <a:latin typeface="Cambria Math"/>
-                        </a:rPr>
-                        <m:t>)−</m:t>
-                      </m:r>
-                      <m:sSup>
-                        <m:e>
-                          <m:r>
-                            <a:rPr sz="2200">
-                              <a:latin typeface="Cambria Math"/>
-                            </a:rPr>
-                            <a:rPr sz="2200">
-                              <a:latin typeface="Cambria Math"/>
-                            </a:rPr>
-                            <m:t>y</m:t>
-                          </m:r>
-                        </m:e>
-                        <m:sup>
-                          <m:r>
-                            <a:rPr sz="2200">
-                              <a:latin typeface="Cambria Math"/>
-                            </a:rPr>
-                            <a:rPr sz="2200">
-                              <a:latin typeface="Cambria Math"/>
-                            </a:rPr>
-                            <m:t>(i)</m:t>
-                          </m:r>
-                        </m:sup>
-                      </m:sSup>
-                      <m:sSup>
-                        <m:e>
-                          <m:r>
-                            <a:rPr sz="2200">
-                              <a:latin typeface="Cambria Math"/>
-                            </a:rPr>
-                            <a:rPr sz="2200">
-                              <a:latin typeface="Cambria Math"/>
-                            </a:rPr>
-                            <m:t>)</m:t>
-                          </m:r>
-                        </m:e>
-                        <m:sup>
-                          <m:r>
-                            <a:rPr sz="2200">
-                              <a:latin typeface="Cambria Math"/>
-                            </a:rPr>
-                            <a:rPr sz="2200">
-                              <a:latin typeface="Cambria Math"/>
-                            </a:rPr>
-                            <m:t>2</m:t>
-                          </m:r>
-                        </m:sup>
-                      </m:sSup>
-                    </m:e>
-                  </m:nary>
-                </m:oMath>
-              </m:oMathPara>
-            </ns0:m>
-          </a:p>
-        </p:txBody>
-      </p:sp>
+                    </m:oMath>
+                  </m:oMathPara>
+                </a14:m>
+                <a:endParaRPr lang="ar-AE" sz="2200" b="0" i="0" dirty="0">
+                  <a:latin typeface="Bookman Old Style"/>
+                </a:endParaRPr>
+              </a:p>
+              <a:p>
+                <a:pPr marL="0" indent="0">
+                  <a:buNone/>
+                </a:pPr>
+                <a:r>
+                  <a:rPr lang="ru-RU" sz="2200" b="0" i="0" dirty="0" err="1">
+                    <a:latin typeface="Bookman Old Style"/>
+                  </a:rPr>
+                  <a:t>Для</a:t>
+                </a:r>
+                <a:r>
+                  <a:rPr lang="ru-RU" sz="2200" b="0" i="0" dirty="0">
+                    <a:latin typeface="Bookman Old Style"/>
+                  </a:rPr>
+                  <a:t> </a:t>
+                </a:r>
+                <a:r>
+                  <a:rPr lang="ru-RU" sz="2200" b="0" i="0" dirty="0" err="1">
+                    <a:latin typeface="Bookman Old Style"/>
+                  </a:rPr>
+                  <a:t>линейной</a:t>
+                </a:r>
+                <a:r>
+                  <a:rPr lang="ru-RU" sz="2200" b="0" i="0" dirty="0">
+                    <a:latin typeface="Bookman Old Style"/>
+                  </a:rPr>
+                  <a:t> </a:t>
+                </a:r>
+                <a:r>
+                  <a:rPr lang="ru-RU" sz="2200" b="0" i="0" dirty="0" err="1">
+                    <a:latin typeface="Bookman Old Style"/>
+                  </a:rPr>
+                  <a:t>регрессии</a:t>
+                </a:r>
+                <a:r>
+                  <a:rPr lang="ru-RU" sz="2200" b="0" i="0" dirty="0">
+                    <a:latin typeface="Bookman Old Style"/>
+                  </a:rPr>
+                  <a:t> </a:t>
+                </a:r>
+                <a:r>
+                  <a:rPr lang="ru-RU" sz="2200" b="0" i="0" dirty="0" err="1">
+                    <a:latin typeface="Bookman Old Style"/>
+                  </a:rPr>
+                  <a:t>функция</a:t>
+                </a:r>
+                <a:r>
+                  <a:rPr lang="ru-RU" sz="2200" b="0" i="0" dirty="0">
+                    <a:latin typeface="Bookman Old Style"/>
+                  </a:rPr>
+                  <a:t> </a:t>
+                </a:r>
+                <a:r>
+                  <a:rPr lang="ru-RU" sz="2200" b="0" i="0" dirty="0" err="1">
+                    <a:latin typeface="Bookman Old Style"/>
+                  </a:rPr>
+                  <a:t>потерь</a:t>
+                </a:r>
+                <a:r>
+                  <a:rPr lang="ru-RU" sz="2200" b="0" i="0" dirty="0">
+                    <a:latin typeface="Bookman Old Style"/>
+                  </a:rPr>
+                  <a:t> (</a:t>
+                </a:r>
+                <a:r>
+                  <a:rPr lang="en-US" sz="2200" b="0" i="0" dirty="0">
+                    <a:latin typeface="Bookman Old Style"/>
+                  </a:rPr>
+                  <a:t>MSE) </a:t>
+                </a:r>
+                <a:r>
+                  <a:rPr lang="ru-RU" sz="2200" b="0" i="0" dirty="0" err="1">
+                    <a:latin typeface="Bookman Old Style"/>
+                  </a:rPr>
+                  <a:t>выглядит</a:t>
+                </a:r>
+                <a:r>
+                  <a:rPr lang="ru-RU" sz="2200" b="0" i="0" dirty="0">
+                    <a:latin typeface="Bookman Old Style"/>
+                  </a:rPr>
+                  <a:t> </a:t>
+                </a:r>
+                <a:r>
+                  <a:rPr lang="ru-RU" sz="2200" b="0" i="0" dirty="0" err="1">
+                    <a:latin typeface="Bookman Old Style"/>
+                  </a:rPr>
+                  <a:t>так</a:t>
+                </a:r>
+                <a:r>
+                  <a:rPr lang="ru-RU" sz="2200" b="0" i="0" dirty="0">
+                    <a:latin typeface="Bookman Old Style"/>
+                  </a:rPr>
+                  <a:t>:
+</a:t>
+                </a:r>
+                <a14:m>
+                  <m:oMath xmlns:m="http://schemas.openxmlformats.org/officeDocument/2006/math">
+                    <m:r>
+                      <a:rPr lang="ru-RU" sz="2200">
+                        <a:latin typeface="Cambria Math"/>
+                      </a:rPr>
+                      <m:t>𝐽</m:t>
+                    </m:r>
+                    <m:r>
+                      <a:rPr lang="ru-RU" sz="2200">
+                        <a:latin typeface="Cambria Math"/>
+                      </a:rPr>
+                      <m:t>(</m:t>
+                    </m:r>
+                    <m:r>
+                      <a:rPr lang="ru-RU" sz="2200">
+                        <a:latin typeface="Cambria Math"/>
+                      </a:rPr>
+                      <m:t>𝜃</m:t>
+                    </m:r>
+                    <m:r>
+                      <a:rPr lang="ru-RU" sz="2200">
+                        <a:latin typeface="Cambria Math"/>
+                      </a:rPr>
+                      <m:t>)=</m:t>
+                    </m:r>
+                    <m:f>
+                      <m:fPr>
+                        <m:ctrlPr>
+                          <a:rPr lang="ar-AE" sz="2200" i="1">
+                            <a:latin typeface="Cambria Math" panose="02040503050406030204" pitchFamily="18" charset="0"/>
+                          </a:rPr>
+                        </m:ctrlPr>
+                      </m:fPr>
+                      <m:num>
+                        <m:r>
+                          <a:rPr lang="ar-AE" sz="2200">
+                            <a:latin typeface="Cambria Math"/>
+                          </a:rPr>
+                          <m:t>1</m:t>
+                        </m:r>
+                      </m:num>
+                      <m:den>
+                        <m:r>
+                          <a:rPr lang="ar-AE" sz="2200">
+                            <a:latin typeface="Cambria Math"/>
+                          </a:rPr>
+                          <m:t>2</m:t>
+                        </m:r>
+                        <m:r>
+                          <a:rPr lang="ar-AE" sz="2200">
+                            <a:latin typeface="Cambria Math"/>
+                          </a:rPr>
+                          <m:t>𝑚</m:t>
+                        </m:r>
+                      </m:den>
+                    </m:f>
+                    <m:nary>
+                      <m:naryPr>
+                        <m:chr m:val="∑"/>
+                        <m:limLoc m:val="subSup"/>
+                        <m:ctrlPr>
+                          <a:rPr lang="ar-AE" sz="2200" i="1">
+                            <a:latin typeface="Cambria Math" panose="02040503050406030204" pitchFamily="18" charset="0"/>
+                          </a:rPr>
+                        </m:ctrlPr>
+                      </m:naryPr>
+                      <m:sub>
+                        <m:r>
+                          <a:rPr lang="ar-AE" sz="2200">
+                            <a:latin typeface="Cambria Math"/>
+                          </a:rPr>
+                          <m:t>𝑖</m:t>
+                        </m:r>
+                        <m:r>
+                          <a:rPr lang="ar-AE" sz="2200">
+                            <a:latin typeface="Cambria Math"/>
+                          </a:rPr>
+                          <m:t>=</m:t>
+                        </m:r>
+                        <m:r>
+                          <a:rPr lang="ar-AE" sz="2200">
+                            <a:latin typeface="Cambria Math"/>
+                          </a:rPr>
+                          <m:t>1</m:t>
+                        </m:r>
+                      </m:sub>
+                      <m:sup>
+                        <m:r>
+                          <a:rPr lang="ar-AE" sz="2200">
+                            <a:latin typeface="Cambria Math"/>
+                          </a:rPr>
+                          <m:t>𝑚</m:t>
+                        </m:r>
+                      </m:sup>
+                      <m:e>
+                        <m:r>
+                          <a:rPr lang="ar-AE" sz="2200">
+                            <a:latin typeface="Cambria Math"/>
+                          </a:rPr>
+                          <m:t>(</m:t>
+                        </m:r>
+                        <m:sSub>
+                          <m:sSubPr>
+                            <m:ctrlPr>
+                              <a:rPr lang="ar-AE" sz="2200" i="1">
+                                <a:latin typeface="Cambria Math" panose="02040503050406030204" pitchFamily="18" charset="0"/>
+                              </a:rPr>
+                            </m:ctrlPr>
+                          </m:sSubPr>
+                          <m:e>
+                            <m:r>
+                              <a:rPr lang="ar-AE" sz="2200">
+                                <a:latin typeface="Cambria Math"/>
+                              </a:rPr>
+                              <m:t>h</m:t>
+                            </m:r>
+                          </m:e>
+                          <m:sub>
+                            <m:r>
+                              <a:rPr lang="ar-AE" sz="2200">
+                                <a:latin typeface="Cambria Math"/>
+                              </a:rPr>
+                              <m:t>𝜃</m:t>
+                            </m:r>
+                          </m:sub>
+                        </m:sSub>
+                        <m:r>
+                          <a:rPr lang="ar-AE" sz="2200">
+                            <a:latin typeface="Cambria Math"/>
+                          </a:rPr>
+                          <m:t>(</m:t>
+                        </m:r>
+                        <m:sSup>
+                          <m:sSupPr>
+                            <m:ctrlPr>
+                              <a:rPr lang="ar-AE" sz="2200" i="1">
+                                <a:latin typeface="Cambria Math" panose="02040503050406030204" pitchFamily="18" charset="0"/>
+                              </a:rPr>
+                            </m:ctrlPr>
+                          </m:sSupPr>
+                          <m:e>
+                            <m:r>
+                              <a:rPr lang="ar-AE" sz="2200">
+                                <a:latin typeface="Cambria Math"/>
+                              </a:rPr>
+                              <m:t>𝑥</m:t>
+                            </m:r>
+                          </m:e>
+                          <m:sup>
+                            <m:r>
+                              <a:rPr lang="ar-AE" sz="2200">
+                                <a:latin typeface="Cambria Math"/>
+                              </a:rPr>
+                              <m:t>(</m:t>
+                            </m:r>
+                            <m:r>
+                              <a:rPr lang="ar-AE" sz="2200">
+                                <a:latin typeface="Cambria Math"/>
+                              </a:rPr>
+                              <m:t>𝑖</m:t>
+                            </m:r>
+                            <m:r>
+                              <a:rPr lang="ar-AE" sz="2200">
+                                <a:latin typeface="Cambria Math"/>
+                              </a:rPr>
+                              <m:t>)</m:t>
+                            </m:r>
+                          </m:sup>
+                        </m:sSup>
+                        <m:r>
+                          <a:rPr lang="ar-AE" sz="2200">
+                            <a:latin typeface="Cambria Math"/>
+                          </a:rPr>
+                          <m:t>)−</m:t>
+                        </m:r>
+                        <m:sSup>
+                          <m:sSupPr>
+                            <m:ctrlPr>
+                              <a:rPr lang="ar-AE" sz="2200" i="1">
+                                <a:latin typeface="Cambria Math" panose="02040503050406030204" pitchFamily="18" charset="0"/>
+                              </a:rPr>
+                            </m:ctrlPr>
+                          </m:sSupPr>
+                          <m:e>
+                            <m:r>
+                              <a:rPr lang="ar-AE" sz="2200">
+                                <a:latin typeface="Cambria Math"/>
+                              </a:rPr>
+                              <m:t>𝑦</m:t>
+                            </m:r>
+                          </m:e>
+                          <m:sup>
+                            <m:r>
+                              <a:rPr lang="ar-AE" sz="2200">
+                                <a:latin typeface="Cambria Math"/>
+                              </a:rPr>
+                              <m:t>(</m:t>
+                            </m:r>
+                            <m:r>
+                              <a:rPr lang="ar-AE" sz="2200">
+                                <a:latin typeface="Cambria Math"/>
+                              </a:rPr>
+                              <m:t>𝑖</m:t>
+                            </m:r>
+                            <m:r>
+                              <a:rPr lang="ar-AE" sz="2200">
+                                <a:latin typeface="Cambria Math"/>
+                              </a:rPr>
+                              <m:t>)</m:t>
+                            </m:r>
+                          </m:sup>
+                        </m:sSup>
+                        <m:sSup>
+                          <m:sSupPr>
+                            <m:ctrlPr>
+                              <a:rPr lang="ar-AE" sz="2200" i="1">
+                                <a:latin typeface="Cambria Math" panose="02040503050406030204" pitchFamily="18" charset="0"/>
+                              </a:rPr>
+                            </m:ctrlPr>
+                          </m:sSupPr>
+                          <m:e>
+                            <m:r>
+                              <a:rPr lang="ar-AE" sz="2200">
+                                <a:latin typeface="Cambria Math"/>
+                              </a:rPr>
+                              <m:t>)</m:t>
+                            </m:r>
+                          </m:e>
+                          <m:sup>
+                            <m:r>
+                              <a:rPr lang="ar-AE" sz="2200">
+                                <a:latin typeface="Cambria Math"/>
+                              </a:rPr>
+                              <m:t>2</m:t>
+                            </m:r>
+                          </m:sup>
+                        </m:sSup>
+                      </m:e>
+                    </m:nary>
+                  </m:oMath>
+                </a14:m>
+                <a:endParaRPr sz="2200" b="0" i="0" dirty="0">
+                  <a:latin typeface="Bookman Old Style"/>
+                </a:endParaRPr>
+              </a:p>
+            </p:txBody>
+          </p:sp>
+        </mc:Choice>
+        <mc:Fallback>
+          <p:sp>
+            <p:nvSpPr>
+              <p:cNvPr id="3" name="Content Placeholder 2"/>
+              <p:cNvSpPr>
+                <a:spLocks noGrp="1" noRot="1" noChangeAspect="1" noMove="1" noResize="1" noEditPoints="1" noAdjustHandles="1" noChangeArrowheads="1" noChangeShapeType="1" noTextEdit="1"/>
+              </p:cNvSpPr>
+              <p:nvPr>
+                <p:ph idx="1"/>
+              </p:nvPr>
+            </p:nvSpPr>
+            <p:spPr>
+              <a:xfrm>
+                <a:off x="0" y="432000"/>
+                <a:ext cx="12192000" cy="5994000"/>
+              </a:xfrm>
+              <a:blipFill rotWithShape="0">
+                <a:blip r:embed="rId2"/>
+                <a:stretch>
+                  <a:fillRect t="-610"/>
+                </a:stretch>
+              </a:blipFill>
+            </p:spPr>
+            <p:txBody>
+              <a:bodyPr/>
+              <a:lstStyle/>
+              <a:p>
+                <a:r>
+                  <a:rPr lang="ru-RU">
+                    <a:noFill/>
+                  </a:rPr>
+                  <a:t> </a:t>
+                </a:r>
+              </a:p>
+            </p:txBody>
+          </p:sp>
+        </mc:Fallback>
+      </mc:AlternateContent>
       <p:sp>
         <p:nvSpPr>
           <p:cNvPr id="4" name="TextBox 3"/>
@@ -3984,7 +4403,7 @@
 </file>
 
 <file path=ppt/slides/slide4.xml><?xml version="1.0" encoding="utf-8"?>
-<p:sld xmlns:a="http://schemas.openxmlformats.org/drawingml/2006/main" xmlns:p="http://schemas.openxmlformats.org/presentationml/2006/main" xmlns:r="http://schemas.openxmlformats.org/officeDocument/2006/relationships">
+<p:sld xmlns:a="http://schemas.openxmlformats.org/drawingml/2006/main" xmlns:r="http://schemas.openxmlformats.org/officeDocument/2006/relationships" xmlns:p="http://schemas.openxmlformats.org/presentationml/2006/main">
   <p:cSld>
     <p:spTree>
       <p:nvGrpSpPr>
@@ -3992,7 +4411,14 @@
         <p:cNvGrpSpPr/>
         <p:nvPr/>
       </p:nvGrpSpPr>
-      <p:grpSpPr/>
+      <p:grpSpPr>
+        <a:xfrm>
+          <a:off x="0" y="0"/>
+          <a:ext cx="0" cy="0"/>
+          <a:chOff x="0" y="0"/>
+          <a:chExt cx="0" cy="0"/>
+        </a:xfrm>
+      </p:grpSpPr>
       <p:sp>
         <p:nvSpPr>
           <p:cNvPr id="2" name="Title 1"/>
@@ -4013,7 +4439,7 @@
           </a:solidFill>
         </p:spPr>
         <p:txBody>
-          <a:bodyPr wrap="square" anchor="ctr" lIns="0" rIns="0" tIns="46800" bIns="46800">
+          <a:bodyPr wrap="square" lIns="0" tIns="46800" rIns="0" bIns="46800" anchor="ctr">
             <a:spAutoFit/>
           </a:bodyPr>
           <a:lstStyle/>
@@ -4030,188 +4456,99 @@
           </a:p>
         </p:txBody>
       </p:sp>
-      <p:sp>
-        <p:nvSpPr>
-          <p:cNvPr id="3" name="Content Placeholder 2"/>
-          <p:cNvSpPr>
-            <a:spLocks noGrp="1"/>
-          </p:cNvSpPr>
-          <p:nvPr>
-            <p:ph idx="1"/>
-          </p:nvPr>
-        </p:nvSpPr>
-        <p:spPr>
-          <a:xfrm>
-            <a:off x="0" y="432000"/>
-            <a:ext cx="12192000" cy="5994000"/>
-          </a:xfrm>
-        </p:spPr>
-        <p:txBody>
-          <a:bodyPr wrap="square" anchor="t" lIns="360000" rIns="360000" tIns="46800" bIns="46800">
-            <a:noAutofit/>
-          </a:bodyPr>
-          <a:lstStyle/>
-          <a:p>
-            <a:pPr marL="0" indent="0">
-              <a:buNone/>
-              <a:lnSpc>
-                <a:spcPct val="115000"/>
-              </a:lnSpc>
-            </a:pPr>
-            <a:r>
-              <a:rPr sz="2200" b="0" i="0">
-                <a:latin typeface="Bookman Old Style"/>
-              </a:rPr>
-              <a:t>Чтобы прийти к минимуму, мы делаем шаги в сторону, противоположную вектору градиента. Правило обновления для каждого параметра </a:t>
-            </a:r>
-            <ns0:m xmlns:ns0="http://schemas.microsoft.com/office/drawing/2010/main">
-              <m:oMathPara xmlns:m="http://schemas.openxmlformats.org/officeDocument/2006/math">
-                <m:oMath xmlns:mml="http://www.w3.org/1998/Math/MathML">
-                  <m:sSub>
-                    <m:e>
-                      <m:r>
-                        <a:rPr sz="2200">
-                          <a:latin typeface="Cambria Math"/>
-                        </a:rPr>
-                        <a:rPr sz="2200">
-                          <a:latin typeface="Cambria Math"/>
-                        </a:rPr>
-                        <m:t>θ</m:t>
-                      </m:r>
-                    </m:e>
-                    <m:sub>
-                      <m:r>
-                        <a:rPr sz="2200">
-                          <a:latin typeface="Cambria Math"/>
-                        </a:rPr>
-                        <a:rPr sz="2200">
-                          <a:latin typeface="Cambria Math"/>
-                        </a:rPr>
-                        <m:t>j</m:t>
-                      </m:r>
-                    </m:sub>
-                  </m:sSub>
-                </m:oMath>
-              </m:oMathPara>
-            </ns0:m>
-            <a:r>
-              <a:rPr sz="2200" b="0" i="0">
-                <a:latin typeface="Bookman Old Style"/>
-              </a:rPr>
-              <a:t> выглядит следующим образом:</a:t>
-            </a:r>
-          </a:p>
-          <a:p>
-            <a:pPr marL="0" indent="0">
-              <a:buNone/>
-              <a:lnSpc>
-                <a:spcPct val="115000"/>
-              </a:lnSpc>
-            </a:pPr>
-            <ns0:m xmlns:ns0="http://schemas.microsoft.com/office/drawing/2010/main">
-              <m:oMathPara xmlns:m="http://schemas.openxmlformats.org/officeDocument/2006/math">
-                <m:oMath xmlns:mml="http://www.w3.org/1998/Math/MathML">
-                  <m:sSub>
-                    <m:e>
-                      <m:r>
-                        <a:rPr sz="2200">
-                          <a:latin typeface="Cambria Math"/>
-                        </a:rPr>
-                        <a:rPr sz="2200">
-                          <a:latin typeface="Cambria Math"/>
-                        </a:rPr>
-                        <m:t>θ</m:t>
-                      </m:r>
-                    </m:e>
-                    <m:sub>
-                      <m:r>
-                        <a:rPr sz="2200">
-                          <a:latin typeface="Cambria Math"/>
-                        </a:rPr>
-                        <a:rPr sz="2200">
-                          <a:latin typeface="Cambria Math"/>
-                        </a:rPr>
-                        <m:t>j</m:t>
-                      </m:r>
-                    </m:sub>
-                  </m:sSub>
-                  <m:r>
-                    <a:rPr sz="2200">
-                      <a:latin typeface="Cambria Math"/>
-                    </a:rPr>
-                    <a:rPr sz="2200">
-                      <a:latin typeface="Cambria Math"/>
-                    </a:rPr>
-                    <m:t>:=</m:t>
-                  </m:r>
-                  <m:sSub>
-                    <m:e>
-                      <m:r>
-                        <a:rPr sz="2200">
-                          <a:latin typeface="Cambria Math"/>
-                        </a:rPr>
-                        <a:rPr sz="2200">
-                          <a:latin typeface="Cambria Math"/>
-                        </a:rPr>
-                        <m:t>θ</m:t>
-                      </m:r>
-                    </m:e>
-                    <m:sub>
-                      <m:r>
-                        <a:rPr sz="2200">
-                          <a:latin typeface="Cambria Math"/>
-                        </a:rPr>
-                        <a:rPr sz="2200">
-                          <a:latin typeface="Cambria Math"/>
-                        </a:rPr>
-                        <m:t>j</m:t>
-                      </m:r>
-                    </m:sub>
-                  </m:sSub>
-                  <m:r>
-                    <a:rPr sz="2200">
-                      <a:latin typeface="Cambria Math"/>
-                    </a:rPr>
-                    <a:rPr sz="2200">
-                      <a:latin typeface="Cambria Math"/>
-                    </a:rPr>
-                    <m:t>−α</m:t>
-                  </m:r>
-                  <m:f>
-                    <m:fPr>
-                      <m:type m:val="bar"/>
-                    </m:fPr>
-                    <m:num>
-                      <m:r>
-                        <a:rPr sz="2200">
-                          <a:latin typeface="Cambria Math"/>
-                        </a:rPr>
-                        <a:rPr sz="2200">
-                          <a:latin typeface="Cambria Math"/>
-                        </a:rPr>
-                        <m:t>∂</m:t>
-                      </m:r>
-                    </m:num>
-                    <m:den>
-                      <m:r>
-                        <a:rPr sz="2200">
-                          <a:latin typeface="Cambria Math"/>
-                        </a:rPr>
-                        <a:rPr sz="2200">
-                          <a:latin typeface="Cambria Math"/>
-                        </a:rPr>
-                        <m:t>∂</m:t>
-                      </m:r>
+      <mc:AlternateContent xmlns:mc="http://schemas.openxmlformats.org/markup-compatibility/2006">
+        <mc:Choice xmlns:a14="http://schemas.microsoft.com/office/drawing/2010/main" Requires="a14">
+          <p:sp>
+            <p:nvSpPr>
+              <p:cNvPr id="3" name="Content Placeholder 2"/>
+              <p:cNvSpPr>
+                <a:spLocks noGrp="1"/>
+              </p:cNvSpPr>
+              <p:nvPr>
+                <p:ph idx="1"/>
+              </p:nvPr>
+            </p:nvSpPr>
+            <p:spPr>
+              <a:xfrm>
+                <a:off x="0" y="432000"/>
+                <a:ext cx="12192000" cy="5994000"/>
+              </a:xfrm>
+            </p:spPr>
+            <p:txBody>
+              <a:bodyPr wrap="square" lIns="360000" tIns="46800" rIns="360000" bIns="46800" anchor="t">
+                <a:noAutofit/>
+              </a:bodyPr>
+              <a:lstStyle/>
+              <a:p>
+                <a:pPr marL="0" indent="0">
+                  <a:buNone/>
+                </a:pPr>
+                <a:r>
+                  <a:rPr sz="2200" b="0" i="0">
+                    <a:latin typeface="Bookman Old Style"/>
+                  </a:rPr>
+                  <a:t>Чтобы прийти к минимуму, мы делаем шаги в сторону, противоположную вектору градиента. Правило обновления для каждого параметра </a:t>
+                </a:r>
+                <a14:m>
+                  <m:oMath xmlns:m="http://schemas.openxmlformats.org/officeDocument/2006/math">
+                    <m:sSub>
+                      <m:sSubPr>
+                        <m:ctrlPr>
+                          <a:rPr sz="2200">
+                            <a:latin typeface="Cambria Math" panose="02040503050406030204" pitchFamily="18" charset="0"/>
+                          </a:rPr>
+                        </m:ctrlPr>
+                      </m:sSubPr>
+                      <m:e>
+                        <m:r>
+                          <a:rPr sz="2200">
+                            <a:latin typeface="Cambria Math"/>
+                          </a:rPr>
+                          <m:t>𝜃</m:t>
+                        </m:r>
+                      </m:e>
+                      <m:sub>
+                        <m:r>
+                          <a:rPr sz="2200">
+                            <a:latin typeface="Cambria Math"/>
+                          </a:rPr>
+                          <m:t>𝑗</m:t>
+                        </m:r>
+                      </m:sub>
+                    </m:sSub>
+                  </m:oMath>
+                </a14:m>
+                <a:r>
+                  <a:rPr sz="2200" b="0" i="0">
+                    <a:latin typeface="Bookman Old Style"/>
+                  </a:rPr>
+                  <a:t> выглядит следующим образом:</a:t>
+                </a:r>
+              </a:p>
+              <a:p>
+                <a:pPr marL="0" indent="0">
+                  <a:buNone/>
+                </a:pPr>
+                <a14:m>
+                  <m:oMathPara xmlns:m="http://schemas.openxmlformats.org/officeDocument/2006/math">
+                    <m:oMathParaPr>
+                      <m:jc m:val="centerGroup"/>
+                    </m:oMathParaPr>
+                    <m:oMath xmlns:m="http://schemas.openxmlformats.org/officeDocument/2006/math">
                       <m:sSub>
+                        <m:sSubPr>
+                          <m:ctrlPr>
+                            <a:rPr sz="2200">
+                              <a:latin typeface="Cambria Math" panose="02040503050406030204" pitchFamily="18" charset="0"/>
+                            </a:rPr>
+                          </m:ctrlPr>
+                        </m:sSubPr>
                         <m:e>
                           <m:r>
                             <a:rPr sz="2200">
                               <a:latin typeface="Cambria Math"/>
                             </a:rPr>
-                            <a:rPr sz="2200">
-                              <a:latin typeface="Cambria Math"/>
-                            </a:rPr>
-                            <m:t>θ</m:t>
+                            <m:t>𝜃</m:t>
                           </m:r>
                         </m:e>
                         <m:sub>
@@ -4219,132 +4556,30 @@
                             <a:rPr sz="2200">
                               <a:latin typeface="Cambria Math"/>
                             </a:rPr>
-                            <a:rPr sz="2200">
-                              <a:latin typeface="Cambria Math"/>
-                            </a:rPr>
-                            <m:t>j</m:t>
+                            <m:t>𝑗</m:t>
                           </m:r>
                         </m:sub>
                       </m:sSub>
-                    </m:den>
-                  </m:f>
-                  <m:r>
-                    <a:rPr sz="2200">
-                      <a:latin typeface="Cambria Math"/>
-                    </a:rPr>
-                    <a:rPr sz="2200">
-                      <a:latin typeface="Cambria Math"/>
-                    </a:rPr>
-                    <m:t>J(θ)</m:t>
-                  </m:r>
-                </m:oMath>
-              </m:oMathPara>
-            </ns0:m>
-          </a:p>
-          <a:p>
-            <a:pPr marL="0" indent="0">
-              <a:buNone/>
-              <a:lnSpc>
-                <a:spcPct val="115000"/>
-              </a:lnSpc>
-            </a:pPr>
-            <a:r>
-              <a:rPr sz="2200" b="0" i="0">
-                <a:latin typeface="Bookman Old Style"/>
-              </a:rPr>
-              <a:t>Где:</a:t>
-            </a:r>
-          </a:p>
-          <a:p>
-            <a:pPr>
-              <a:lnSpc>
-                <a:spcPct val="115000"/>
-              </a:lnSpc>
-              <a:spcAft>
-                <a:spcPts val="0"/>
-              </a:spcAft>
-            </a:pPr>
-            <ns0:m xmlns:ns0="http://schemas.microsoft.com/office/drawing/2010/main">
-              <m:oMathPara xmlns:m="http://schemas.openxmlformats.org/officeDocument/2006/math">
-                <m:oMath xmlns:mml="http://www.w3.org/1998/Math/MathML">
-                  <m:r>
-                    <a:rPr sz="2200">
-                      <a:latin typeface="Cambria Math"/>
-                    </a:rPr>
-                    <a:rPr sz="2200">
-                      <a:latin typeface="Cambria Math"/>
-                    </a:rPr>
-                    <m:t>α</m:t>
-                  </m:r>
-                </m:oMath>
-              </m:oMathPara>
-            </ns0:m>
-            <a:r>
-              <a:rPr sz="2200" b="0" i="0">
-                <a:latin typeface="Bookman Old Style"/>
-              </a:rPr>
-              <a:t> — скорость обучения (</a:t>
-            </a:r>
-            <a:r>
-              <a:rPr sz="2200" b="0" i="1">
-                <a:latin typeface="Bookman Old Style"/>
-              </a:rPr>
-              <a:t>learning rate</a:t>
-            </a:r>
-            <a:r>
-              <a:rPr sz="2200" b="0" i="0">
-                <a:latin typeface="Bookman Old Style"/>
-              </a:rPr>
-              <a:t>).</a:t>
-            </a:r>
-          </a:p>
-          <a:p>
-            <a:pPr>
-              <a:lnSpc>
-                <a:spcPct val="115000"/>
-              </a:lnSpc>
-              <a:spcAft>
-                <a:spcPts val="0"/>
-              </a:spcAft>
-            </a:pPr>
-            <ns0:m xmlns:ns0="http://schemas.microsoft.com/office/drawing/2010/main">
-              <m:oMathPara xmlns:m="http://schemas.openxmlformats.org/officeDocument/2006/math">
-                <m:oMath xmlns:mml="http://www.w3.org/1998/Math/MathML">
-                  <m:f>
-                    <m:fPr>
-                      <m:type m:val="bar"/>
-                    </m:fPr>
-                    <m:num>
                       <m:r>
                         <a:rPr sz="2200">
                           <a:latin typeface="Cambria Math"/>
                         </a:rPr>
-                        <a:rPr sz="2200">
-                          <a:latin typeface="Cambria Math"/>
-                        </a:rPr>
-                        <m:t>∂</m:t>
-                      </m:r>
-                    </m:num>
-                    <m:den>
-                      <m:r>
-                        <a:rPr sz="2200">
-                          <a:latin typeface="Cambria Math"/>
-                        </a:rPr>
-                        <a:rPr sz="2200">
-                          <a:latin typeface="Cambria Math"/>
-                        </a:rPr>
-                        <m:t>∂</m:t>
+                        <m:t>:=</m:t>
                       </m:r>
                       <m:sSub>
+                        <m:sSubPr>
+                          <m:ctrlPr>
+                            <a:rPr sz="2200" i="1">
+                              <a:latin typeface="Cambria Math" panose="02040503050406030204" pitchFamily="18" charset="0"/>
+                            </a:rPr>
+                          </m:ctrlPr>
+                        </m:sSubPr>
                         <m:e>
                           <m:r>
                             <a:rPr sz="2200">
                               <a:latin typeface="Cambria Math"/>
                             </a:rPr>
-                            <a:rPr sz="2200">
-                              <a:latin typeface="Cambria Math"/>
-                            </a:rPr>
-                            <m:t>θ</m:t>
+                            <m:t>𝜃</m:t>
                           </m:r>
                         </m:e>
                         <m:sub>
@@ -4352,105 +4587,385 @@
                             <a:rPr sz="2200">
                               <a:latin typeface="Cambria Math"/>
                             </a:rPr>
-                            <a:rPr sz="2200">
-                              <a:latin typeface="Cambria Math"/>
-                            </a:rPr>
-                            <m:t>j</m:t>
+                            <m:t>𝑗</m:t>
                           </m:r>
                         </m:sub>
                       </m:sSub>
-                    </m:den>
-                  </m:f>
-                  <m:r>
-                    <a:rPr sz="2200">
-                      <a:latin typeface="Cambria Math"/>
-                    </a:rPr>
-                    <a:rPr sz="2200">
-                      <a:latin typeface="Cambria Math"/>
-                    </a:rPr>
-                    <m:t>J(θ)</m:t>
-                  </m:r>
-                </m:oMath>
-              </m:oMathPara>
-            </ns0:m>
-            <a:r>
-              <a:rPr sz="2200" b="0" i="0">
-                <a:latin typeface="Bookman Old Style"/>
-              </a:rPr>
-              <a:t> — частная производная функции по параметру.</a:t>
-            </a:r>
-          </a:p>
-          <a:p>
-            <a:pPr marL="0" indent="0">
-              <a:buNone/>
-              <a:lnSpc>
-                <a:spcPct val="115000"/>
-              </a:lnSpc>
-            </a:pPr>
-            <a:r>
-              <a:rPr sz="2200" b="0" i="0">
-                <a:latin typeface="Bookman Old Style"/>
-              </a:rPr>
-              <a:t>В векторном виде:</a:t>
-            </a:r>
-            <a:r>
-              <a:rPr sz="2200" b="0" i="0">
-                <a:latin typeface="Bookman Old Style"/>
-              </a:rPr>
-              <a:t>
-</a:t>
-            </a:r>
-            <ns0:m xmlns:ns0="http://schemas.microsoft.com/office/drawing/2010/main">
-              <m:oMathPara xmlns:m="http://schemas.openxmlformats.org/officeDocument/2006/math">
-                <m:oMath xmlns:mml="http://www.w3.org/1998/Math/MathML">
-                  <m:r>
-                    <a:rPr sz="2200">
-                      <a:latin typeface="Cambria Math"/>
-                    </a:rPr>
-                    <a:rPr sz="2200">
-                      <a:latin typeface="Cambria Math"/>
-                    </a:rPr>
-                    <m:t>θ:=θ−α</m:t>
-                  </m:r>
-                  <m:sSub>
-                    <m:e>
                       <m:r>
                         <a:rPr sz="2200">
                           <a:latin typeface="Cambria Math"/>
                         </a:rPr>
-                        <a:rPr sz="2200">
-                          <a:latin typeface="Cambria Math"/>
-                        </a:rPr>
-                        <m:t>∇</m:t>
+                        <m:t>−</m:t>
                       </m:r>
-                    </m:e>
-                    <m:sub>
                       <m:r>
                         <a:rPr sz="2200">
                           <a:latin typeface="Cambria Math"/>
                         </a:rPr>
+                        <m:t>𝛼</m:t>
+                      </m:r>
+                      <m:f>
+                        <m:fPr>
+                          <m:ctrlPr>
+                            <a:rPr sz="2200" i="1">
+                              <a:latin typeface="Cambria Math" panose="02040503050406030204" pitchFamily="18" charset="0"/>
+                            </a:rPr>
+                          </m:ctrlPr>
+                        </m:fPr>
+                        <m:num>
+                          <m:r>
+                            <a:rPr sz="2200">
+                              <a:latin typeface="Cambria Math"/>
+                            </a:rPr>
+                            <m:t>𝜕</m:t>
+                          </m:r>
+                        </m:num>
+                        <m:den>
+                          <m:r>
+                            <a:rPr sz="2200">
+                              <a:latin typeface="Cambria Math"/>
+                            </a:rPr>
+                            <m:t>𝜕</m:t>
+                          </m:r>
+                          <m:sSub>
+                            <m:sSubPr>
+                              <m:ctrlPr>
+                                <a:rPr sz="2200" i="1">
+                                  <a:latin typeface="Cambria Math" panose="02040503050406030204" pitchFamily="18" charset="0"/>
+                                </a:rPr>
+                              </m:ctrlPr>
+                            </m:sSubPr>
+                            <m:e>
+                              <m:r>
+                                <a:rPr sz="2200">
+                                  <a:latin typeface="Cambria Math"/>
+                                </a:rPr>
+                                <m:t>𝜃</m:t>
+                              </m:r>
+                            </m:e>
+                            <m:sub>
+                              <m:r>
+                                <a:rPr sz="2200">
+                                  <a:latin typeface="Cambria Math"/>
+                                </a:rPr>
+                                <m:t>𝑗</m:t>
+                              </m:r>
+                            </m:sub>
+                          </m:sSub>
+                        </m:den>
+                      </m:f>
+                      <m:r>
                         <a:rPr sz="2200">
                           <a:latin typeface="Cambria Math"/>
                         </a:rPr>
-                        <m:t>θ</m:t>
+                        <m:t>𝐽</m:t>
                       </m:r>
-                    </m:sub>
-                  </m:sSub>
-                  <m:r>
-                    <a:rPr sz="2200">
-                      <a:latin typeface="Cambria Math"/>
-                    </a:rPr>
-                    <a:rPr sz="2200">
-                      <a:latin typeface="Cambria Math"/>
-                    </a:rPr>
-                    <m:t>J(θ)</m:t>
-                  </m:r>
-                </m:oMath>
-              </m:oMathPara>
-            </ns0:m>
-          </a:p>
-        </p:txBody>
-      </p:sp>
+                      <m:r>
+                        <a:rPr sz="2200">
+                          <a:latin typeface="Cambria Math"/>
+                        </a:rPr>
+                        <m:t>(</m:t>
+                      </m:r>
+                      <m:r>
+                        <a:rPr sz="2200">
+                          <a:latin typeface="Cambria Math"/>
+                        </a:rPr>
+                        <m:t>𝜃</m:t>
+                      </m:r>
+                      <m:r>
+                        <a:rPr sz="2200">
+                          <a:latin typeface="Cambria Math"/>
+                        </a:rPr>
+                        <m:t>)</m:t>
+                      </m:r>
+                    </m:oMath>
+                  </m:oMathPara>
+                </a14:m>
+                <a:endParaRPr sz="2200" b="0" i="0">
+                  <a:latin typeface="Bookman Old Style"/>
+                </a:endParaRPr>
+              </a:p>
+              <a:p>
+                <a:pPr marL="0" indent="0">
+                  <a:buNone/>
+                </a:pPr>
+                <a:r>
+                  <a:rPr sz="2200" b="0" i="0">
+                    <a:latin typeface="Bookman Old Style"/>
+                  </a:rPr>
+                  <a:t>Где:</a:t>
+                </a:r>
+              </a:p>
+              <a:p>
+                <a:pPr>
+                  <a:lnSpc>
+                    <a:spcPct val="115000"/>
+                  </a:lnSpc>
+                  <a:spcAft>
+                    <a:spcPts val="0"/>
+                  </a:spcAft>
+                </a:pPr>
+                <a14:m>
+                  <m:oMath xmlns:m="http://schemas.openxmlformats.org/officeDocument/2006/math">
+                    <m:r>
+                      <a:rPr sz="2200">
+                        <a:latin typeface="Cambria Math"/>
+                      </a:rPr>
+                      <m:t>𝛼</m:t>
+                    </m:r>
+                  </m:oMath>
+                </a14:m>
+                <a:r>
+                  <a:rPr sz="2200" b="0" i="0">
+                    <a:latin typeface="Bookman Old Style"/>
+                  </a:rPr>
+                  <a:t> — скорость обучения (</a:t>
+                </a:r>
+                <a:r>
+                  <a:rPr sz="2200" b="0" i="1">
+                    <a:latin typeface="Bookman Old Style"/>
+                  </a:rPr>
+                  <a:t>learning rate</a:t>
+                </a:r>
+                <a:r>
+                  <a:rPr sz="2200" b="0" i="0">
+                    <a:latin typeface="Bookman Old Style"/>
+                  </a:rPr>
+                  <a:t>).</a:t>
+                </a:r>
+              </a:p>
+              <a:p>
+                <a:pPr>
+                  <a:lnSpc>
+                    <a:spcPct val="115000"/>
+                  </a:lnSpc>
+                  <a:spcAft>
+                    <a:spcPts val="0"/>
+                  </a:spcAft>
+                </a:pPr>
+                <a14:m>
+                  <m:oMath xmlns:m="http://schemas.openxmlformats.org/officeDocument/2006/math">
+                    <m:f>
+                      <m:fPr>
+                        <m:ctrlPr>
+                          <a:rPr sz="2200">
+                            <a:latin typeface="Cambria Math" panose="02040503050406030204" pitchFamily="18" charset="0"/>
+                          </a:rPr>
+                        </m:ctrlPr>
+                      </m:fPr>
+                      <m:num>
+                        <m:r>
+                          <a:rPr sz="2200">
+                            <a:latin typeface="Cambria Math"/>
+                          </a:rPr>
+                          <m:t>𝜕</m:t>
+                        </m:r>
+                      </m:num>
+                      <m:den>
+                        <m:r>
+                          <a:rPr sz="2200">
+                            <a:latin typeface="Cambria Math"/>
+                          </a:rPr>
+                          <m:t>𝜕</m:t>
+                        </m:r>
+                        <m:sSub>
+                          <m:sSubPr>
+                            <m:ctrlPr>
+                              <a:rPr sz="2200" i="1">
+                                <a:latin typeface="Cambria Math" panose="02040503050406030204" pitchFamily="18" charset="0"/>
+                              </a:rPr>
+                            </m:ctrlPr>
+                          </m:sSubPr>
+                          <m:e>
+                            <m:r>
+                              <a:rPr sz="2200">
+                                <a:latin typeface="Cambria Math"/>
+                              </a:rPr>
+                              <m:t>𝜃</m:t>
+                            </m:r>
+                          </m:e>
+                          <m:sub>
+                            <m:r>
+                              <a:rPr sz="2200">
+                                <a:latin typeface="Cambria Math"/>
+                              </a:rPr>
+                              <m:t>𝑗</m:t>
+                            </m:r>
+                          </m:sub>
+                        </m:sSub>
+                      </m:den>
+                    </m:f>
+                    <m:r>
+                      <a:rPr sz="2200">
+                        <a:latin typeface="Cambria Math"/>
+                      </a:rPr>
+                      <m:t>𝐽</m:t>
+                    </m:r>
+                    <m:r>
+                      <a:rPr sz="2200">
+                        <a:latin typeface="Cambria Math"/>
+                      </a:rPr>
+                      <m:t>(</m:t>
+                    </m:r>
+                    <m:r>
+                      <a:rPr sz="2200">
+                        <a:latin typeface="Cambria Math"/>
+                      </a:rPr>
+                      <m:t>𝜃</m:t>
+                    </m:r>
+                    <m:r>
+                      <a:rPr sz="2200">
+                        <a:latin typeface="Cambria Math"/>
+                      </a:rPr>
+                      <m:t>)</m:t>
+                    </m:r>
+                  </m:oMath>
+                </a14:m>
+                <a:r>
+                  <a:rPr sz="2200" b="0" i="0">
+                    <a:latin typeface="Bookman Old Style"/>
+                  </a:rPr>
+                  <a:t> — частная производная функции по параметру.</a:t>
+                </a:r>
+              </a:p>
+              <a:p>
+                <a:pPr marL="0" indent="0">
+                  <a:buNone/>
+                </a:pPr>
+                <a:r>
+                  <a:rPr sz="2200" b="0" i="0">
+                    <a:latin typeface="Bookman Old Style"/>
+                  </a:rPr>
+                  <a:t>В векторном виде:
+</a:t>
+                </a:r>
+                <a14:m>
+                  <m:oMath xmlns:m="http://schemas.openxmlformats.org/officeDocument/2006/math">
+                    <m:r>
+                      <a:rPr sz="2200">
+                        <a:latin typeface="Cambria Math"/>
+                      </a:rPr>
+                      <m:t>𝜃</m:t>
+                    </m:r>
+                    <m:r>
+                      <a:rPr sz="2200">
+                        <a:latin typeface="Cambria Math"/>
+                      </a:rPr>
+                      <m:t>:=</m:t>
+                    </m:r>
+                    <m:r>
+                      <a:rPr sz="2200">
+                        <a:latin typeface="Cambria Math"/>
+                      </a:rPr>
+                      <m:t>𝜃</m:t>
+                    </m:r>
+                    <m:r>
+                      <a:rPr sz="2200">
+                        <a:latin typeface="Cambria Math"/>
+                      </a:rPr>
+                      <m:t>−</m:t>
+                    </m:r>
+                    <m:r>
+                      <a:rPr sz="2200">
+                        <a:latin typeface="Cambria Math"/>
+                      </a:rPr>
+                      <m:t>𝛼</m:t>
+                    </m:r>
+                    <m:sSub>
+                      <m:sSubPr>
+                        <m:ctrlPr>
+                          <a:rPr sz="2200" i="1">
+                            <a:latin typeface="Cambria Math" panose="02040503050406030204" pitchFamily="18" charset="0"/>
+                          </a:rPr>
+                        </m:ctrlPr>
+                      </m:sSubPr>
+                      <m:e>
+                        <m:r>
+                          <a:rPr sz="2200">
+                            <a:latin typeface="Cambria Math"/>
+                          </a:rPr>
+                          <m:t>𝛻</m:t>
+                        </m:r>
+                      </m:e>
+                      <m:sub>
+                        <m:r>
+                          <a:rPr sz="2200">
+                            <a:latin typeface="Cambria Math"/>
+                          </a:rPr>
+                          <m:t>𝜃</m:t>
+                        </m:r>
+                      </m:sub>
+                    </m:sSub>
+                    <m:r>
+                      <a:rPr sz="2200">
+                        <a:latin typeface="Cambria Math"/>
+                      </a:rPr>
+                      <m:t>𝐽</m:t>
+                    </m:r>
+                    <m:r>
+                      <a:rPr sz="2200">
+                        <a:latin typeface="Cambria Math"/>
+                      </a:rPr>
+                      <m:t>(</m:t>
+                    </m:r>
+                    <m:r>
+                      <a:rPr sz="2200">
+                        <a:latin typeface="Cambria Math"/>
+                      </a:rPr>
+                      <m:t>𝜃</m:t>
+                    </m:r>
+                    <m:r>
+                      <a:rPr sz="2200">
+                        <a:latin typeface="Cambria Math"/>
+                      </a:rPr>
+                      <m:t>)</m:t>
+                    </m:r>
+                  </m:oMath>
+                </a14:m>
+                <a:endParaRPr sz="2200" b="0" i="0">
+                  <a:latin typeface="Bookman Old Style"/>
+                </a:endParaRPr>
+              </a:p>
+            </p:txBody>
+          </p:sp>
+        </mc:Choice>
+        <mc:Fallback>
+          <p:sp>
+            <p:nvSpPr>
+              <p:cNvPr id="3" name="Content Placeholder 2"/>
+              <p:cNvSpPr>
+                <a:spLocks noGrp="1" noRot="1" noChangeAspect="1" noMove="1" noResize="1" noEditPoints="1" noAdjustHandles="1" noChangeArrowheads="1" noChangeShapeType="1" noTextEdit="1"/>
+              </p:cNvSpPr>
+              <p:nvPr>
+                <p:ph idx="1"/>
+              </p:nvPr>
+            </p:nvSpPr>
+            <p:spPr>
+              <a:xfrm>
+                <a:off x="0" y="432000"/>
+                <a:ext cx="12192000" cy="5994000"/>
+              </a:xfrm>
+              <a:blipFill rotWithShape="0">
+                <a:blip r:embed="rId2"/>
+                <a:stretch>
+                  <a:fillRect t="-610"/>
+                </a:stretch>
+              </a:blipFill>
+            </p:spPr>
+            <p:txBody>
+              <a:bodyPr/>
+              <a:lstStyle/>
+              <a:p>
+                <a:r>
+                  <a:rPr lang="ru-RU">
+                    <a:noFill/>
+                  </a:rPr>
+                  <a:t> </a:t>
+                </a:r>
+              </a:p>
+            </p:txBody>
+          </p:sp>
+        </mc:Fallback>
+      </mc:AlternateContent>
       <p:sp>
         <p:nvSpPr>
           <p:cNvPr id="4" name="TextBox 3"/>
@@ -4536,7 +5051,7 @@
 </file>
 
 <file path=ppt/slides/slide5.xml><?xml version="1.0" encoding="utf-8"?>
-<p:sld xmlns:a="http://schemas.openxmlformats.org/drawingml/2006/main" xmlns:p="http://schemas.openxmlformats.org/presentationml/2006/main" xmlns:r="http://schemas.openxmlformats.org/officeDocument/2006/relationships">
+<p:sld xmlns:a="http://schemas.openxmlformats.org/drawingml/2006/main" xmlns:r="http://schemas.openxmlformats.org/officeDocument/2006/relationships" xmlns:p="http://schemas.openxmlformats.org/presentationml/2006/main">
   <p:cSld>
     <p:spTree>
       <p:nvGrpSpPr>
@@ -4544,7 +5059,14 @@
         <p:cNvGrpSpPr/>
         <p:nvPr/>
       </p:nvGrpSpPr>
-      <p:grpSpPr/>
+      <p:grpSpPr>
+        <a:xfrm>
+          <a:off x="0" y="0"/>
+          <a:ext cx="0" cy="0"/>
+          <a:chOff x="0" y="0"/>
+          <a:chExt cx="0" cy="0"/>
+        </a:xfrm>
+      </p:grpSpPr>
       <p:sp>
         <p:nvSpPr>
           <p:cNvPr id="2" name="Title 1"/>
@@ -4565,7 +5087,7 @@
           </a:solidFill>
         </p:spPr>
         <p:txBody>
-          <a:bodyPr wrap="square" anchor="ctr" lIns="0" rIns="0" tIns="46800" bIns="46800">
+          <a:bodyPr wrap="square" lIns="0" tIns="46800" rIns="0" bIns="46800" anchor="ctr">
             <a:spAutoFit/>
           </a:bodyPr>
           <a:lstStyle/>
@@ -4582,349 +5104,777 @@
           </a:p>
         </p:txBody>
       </p:sp>
-      <p:sp>
-        <p:nvSpPr>
-          <p:cNvPr id="3" name="Content Placeholder 2"/>
-          <p:cNvSpPr>
-            <a:spLocks noGrp="1"/>
-          </p:cNvSpPr>
-          <p:nvPr>
-            <p:ph idx="1"/>
-          </p:nvPr>
-        </p:nvSpPr>
-        <p:spPr>
-          <a:xfrm>
-            <a:off x="0" y="432000"/>
-            <a:ext cx="12192000" cy="5994000"/>
-          </a:xfrm>
-        </p:spPr>
-        <p:txBody>
-          <a:bodyPr wrap="square" anchor="t" lIns="360000" rIns="360000" tIns="46800" bIns="46800">
-            <a:noAutofit/>
-          </a:bodyPr>
-          <a:lstStyle/>
-          <a:p>
-            <a:pPr marL="0" indent="0">
-              <a:buNone/>
-              <a:lnSpc>
-                <a:spcPct val="115000"/>
-              </a:lnSpc>
-            </a:pPr>
-            <a:r>
-              <a:rPr sz="2200" b="0" i="0">
-                <a:latin typeface="Bookman Old Style"/>
-              </a:rPr>
-              <a:t>Градиент </a:t>
-            </a:r>
-            <ns0:m xmlns:ns0="http://schemas.microsoft.com/office/drawing/2010/main">
-              <m:oMathPara xmlns:m="http://schemas.openxmlformats.org/officeDocument/2006/math">
-                <m:oMath xmlns:mml="http://www.w3.org/1998/Math/MathML">
-                  <m:r>
-                    <a:rPr sz="2200">
-                      <a:latin typeface="Cambria Math"/>
-                    </a:rPr>
-                    <a:rPr sz="2200">
-                      <a:latin typeface="Cambria Math"/>
-                    </a:rPr>
-                    <m:t>∇f</m:t>
-                  </m:r>
-                </m:oMath>
-              </m:oMathPara>
-            </ns0:m>
-            <a:r>
-              <a:rPr sz="2200" b="0" i="0">
-                <a:latin typeface="Bookman Old Style"/>
-              </a:rPr>
-              <a:t> — это вектор, указывающий направление наискорейшего роста функции:</a:t>
-            </a:r>
-          </a:p>
-          <a:p>
-            <a:pPr marL="0" indent="0">
-              <a:buNone/>
-              <a:lnSpc>
-                <a:spcPct val="115000"/>
-              </a:lnSpc>
-            </a:pPr>
-            <ns0:m xmlns:ns0="http://schemas.microsoft.com/office/drawing/2010/main">
-              <m:oMathPara xmlns:m="http://schemas.openxmlformats.org/officeDocument/2006/math">
-                <m:oMath xmlns:mml="http://www.w3.org/1998/Math/MathML">
-                  <m:r>
-                    <a:rPr sz="2200">
-                      <a:latin typeface="Cambria Math"/>
-                    </a:rPr>
-                    <a:rPr sz="2200">
-                      <a:latin typeface="Cambria Math"/>
-                    </a:rPr>
-                    <m:t>∇f(x)=</m:t>
-                  </m:r>
-                  <m:r>
-                    <a:rPr sz="2200">
-                      <a:latin typeface="Cambria Math"/>
-                    </a:rPr>
-                    <a:rPr sz="2200">
-                      <a:latin typeface="Cambria Math"/>
-                    </a:rPr>
-                    <m:t>[</m:t>
-                  </m:r>
-                  <m:eqArr>
-                    <m:e>
-                      <m:f>
-                        <m:fPr>
-                          <m:type m:val="bar"/>
-                        </m:fPr>
-                        <m:num>
+      <mc:AlternateContent xmlns:mc="http://schemas.openxmlformats.org/markup-compatibility/2006">
+        <mc:Choice xmlns:a14="http://schemas.microsoft.com/office/drawing/2010/main" Requires="a14">
+          <p:sp>
+            <p:nvSpPr>
+              <p:cNvPr id="3" name="Content Placeholder 2"/>
+              <p:cNvSpPr>
+                <a:spLocks noGrp="1"/>
+              </p:cNvSpPr>
+              <p:nvPr>
+                <p:ph idx="1"/>
+              </p:nvPr>
+            </p:nvSpPr>
+            <p:spPr>
+              <a:xfrm>
+                <a:off x="0" y="432000"/>
+                <a:ext cx="12192000" cy="5994000"/>
+              </a:xfrm>
+            </p:spPr>
+            <p:txBody>
+              <a:bodyPr wrap="square" lIns="360000" tIns="46800" rIns="360000" bIns="46800" anchor="t">
+                <a:noAutofit/>
+              </a:bodyPr>
+              <a:lstStyle/>
+              <a:p>
+                <a:pPr marL="0" indent="0">
+                  <a:buNone/>
+                </a:pPr>
+                <a:r>
+                  <a:rPr sz="2200" b="0" i="0" dirty="0" err="1">
+                    <a:latin typeface="Bookman Old Style"/>
+                  </a:rPr>
+                  <a:t>Градиент</a:t>
+                </a:r>
+                <a:r>
+                  <a:rPr sz="2200" b="0" i="0" dirty="0">
+                    <a:latin typeface="Bookman Old Style"/>
+                  </a:rPr>
+                  <a:t> </a:t>
+                </a:r>
+                <a14:m>
+                  <m:oMath xmlns:m="http://schemas.openxmlformats.org/officeDocument/2006/math">
+                    <m:r>
+                      <a:rPr sz="2200">
+                        <a:latin typeface="Cambria Math"/>
+                      </a:rPr>
+                      <m:t>𝛻</m:t>
+                    </m:r>
+                    <m:r>
+                      <a:rPr sz="2200">
+                        <a:latin typeface="Cambria Math"/>
+                      </a:rPr>
+                      <m:t>𝑓</m:t>
+                    </m:r>
+                  </m:oMath>
+                </a14:m>
+                <a:r>
+                  <a:rPr sz="2200" b="0" i="0" dirty="0">
+                    <a:latin typeface="Bookman Old Style"/>
+                  </a:rPr>
+                  <a:t> — </a:t>
+                </a:r>
+                <a:r>
+                  <a:rPr sz="2200" b="0" i="0" dirty="0" err="1">
+                    <a:latin typeface="Bookman Old Style"/>
+                  </a:rPr>
+                  <a:t>это</a:t>
+                </a:r>
+                <a:r>
+                  <a:rPr sz="2200" b="0" i="0" dirty="0">
+                    <a:latin typeface="Bookman Old Style"/>
+                  </a:rPr>
+                  <a:t> </a:t>
+                </a:r>
+                <a:r>
+                  <a:rPr sz="2200" b="0" i="0" dirty="0" err="1">
+                    <a:latin typeface="Bookman Old Style"/>
+                  </a:rPr>
+                  <a:t>вектор</a:t>
+                </a:r>
+                <a:r>
+                  <a:rPr sz="2200" b="0" i="0" dirty="0">
+                    <a:latin typeface="Bookman Old Style"/>
+                  </a:rPr>
+                  <a:t>, </a:t>
+                </a:r>
+                <a:r>
+                  <a:rPr sz="2200" b="0" i="0" dirty="0" err="1">
+                    <a:latin typeface="Bookman Old Style"/>
+                  </a:rPr>
+                  <a:t>указывающий</a:t>
+                </a:r>
+                <a:r>
+                  <a:rPr sz="2200" b="0" i="0" dirty="0">
+                    <a:latin typeface="Bookman Old Style"/>
+                  </a:rPr>
+                  <a:t> </a:t>
+                </a:r>
+                <a:r>
+                  <a:rPr sz="2200" b="0" i="0" dirty="0" err="1">
+                    <a:latin typeface="Bookman Old Style"/>
+                  </a:rPr>
+                  <a:t>направление</a:t>
+                </a:r>
+                <a:r>
+                  <a:rPr sz="2200" b="0" i="0" dirty="0">
+                    <a:latin typeface="Bookman Old Style"/>
+                  </a:rPr>
+                  <a:t> </a:t>
+                </a:r>
+                <a:r>
+                  <a:rPr sz="2200" b="0" i="0" dirty="0" err="1">
+                    <a:latin typeface="Bookman Old Style"/>
+                  </a:rPr>
+                  <a:t>наискорейшего</a:t>
+                </a:r>
+                <a:r>
+                  <a:rPr sz="2200" b="0" i="0" dirty="0">
+                    <a:latin typeface="Bookman Old Style"/>
+                  </a:rPr>
+                  <a:t> </a:t>
+                </a:r>
+                <a:r>
+                  <a:rPr sz="2200" b="0" i="0" dirty="0" err="1">
+                    <a:latin typeface="Bookman Old Style"/>
+                  </a:rPr>
+                  <a:t>роста</a:t>
+                </a:r>
+                <a:r>
+                  <a:rPr sz="2200" b="0" i="0" dirty="0">
+                    <a:latin typeface="Bookman Old Style"/>
+                  </a:rPr>
+                  <a:t> </a:t>
+                </a:r>
+                <a:r>
+                  <a:rPr sz="2200" b="0" i="0" dirty="0" err="1">
+                    <a:latin typeface="Bookman Old Style"/>
+                  </a:rPr>
+                  <a:t>функции</a:t>
+                </a:r>
+                <a:r>
+                  <a:rPr sz="2200" b="0" i="0" dirty="0">
+                    <a:latin typeface="Bookman Old Style"/>
+                  </a:rPr>
+                  <a:t>:</a:t>
+                </a:r>
+              </a:p>
+              <a:p>
+                <a:pPr marL="0" indent="0">
+                  <a:buNone/>
+                </a:pPr>
+                <a14:m>
+                  <m:oMathPara xmlns:m="http://schemas.openxmlformats.org/officeDocument/2006/math">
+                    <m:oMathParaPr>
+                      <m:jc m:val="centerGroup"/>
+                    </m:oMathParaPr>
+                    <m:oMath xmlns:m="http://schemas.openxmlformats.org/officeDocument/2006/math">
+                      <m:r>
+                        <a:rPr sz="2200">
+                          <a:latin typeface="Cambria Math"/>
+                        </a:rPr>
+                        <m:t>𝛻</m:t>
+                      </m:r>
+                      <m:r>
+                        <a:rPr sz="2200">
+                          <a:latin typeface="Cambria Math"/>
+                        </a:rPr>
+                        <m:t>𝑓</m:t>
+                      </m:r>
+                      <m:r>
+                        <a:rPr sz="2200">
+                          <a:latin typeface="Cambria Math"/>
+                        </a:rPr>
+                        <m:t>(</m:t>
+                      </m:r>
+                      <m:r>
+                        <a:rPr sz="2200">
+                          <a:latin typeface="Cambria Math"/>
+                        </a:rPr>
+                        <m:t>𝑥</m:t>
+                      </m:r>
+                      <m:r>
+                        <a:rPr sz="2200">
+                          <a:latin typeface="Cambria Math"/>
+                        </a:rPr>
+                        <m:t>)=</m:t>
+                      </m:r>
+                      <m:d>
+                        <m:dPr>
+                          <m:begChr m:val="["/>
+                          <m:endChr m:val="]"/>
+                          <m:ctrlPr>
+                            <a:rPr lang="ru-RU" sz="2200" i="1" smtClean="0">
+                              <a:latin typeface="Cambria Math" panose="02040503050406030204" pitchFamily="18" charset="0"/>
+                            </a:rPr>
+                          </m:ctrlPr>
+                        </m:dPr>
+                        <m:e>
+                          <m:m>
+                            <m:mPr>
+                              <m:mcs>
+                                <m:mc>
+                                  <m:mcPr>
+                                    <m:count m:val="1"/>
+                                    <m:mcJc m:val="center"/>
+                                  </m:mcPr>
+                                </m:mc>
+                              </m:mcs>
+                              <m:ctrlPr>
+                                <a:rPr lang="ru-RU" sz="2200" i="1" smtClean="0">
+                                  <a:latin typeface="Cambria Math" panose="02040503050406030204" pitchFamily="18" charset="0"/>
+                                </a:rPr>
+                              </m:ctrlPr>
+                            </m:mPr>
+                            <m:mr>
+                              <m:e/>
+                            </m:mr>
+                            <m:mr>
+                              <m:e/>
+                            </m:mr>
+                            <m:mr>
+                              <m:e/>
+                            </m:mr>
+                          </m:m>
+                        </m:e>
+                      </m:d>
+                      <m:r>
+                        <a:rPr lang="ru-RU" sz="2200" i="1" smtClean="0">
+                          <a:latin typeface="Cambria Math" panose="02040503050406030204" pitchFamily="18" charset="0"/>
+                        </a:rPr>
+                        <m:t> </m:t>
+                      </m:r>
+                      <m:r>
+                        <a:rPr sz="2200">
+                          <a:latin typeface="Cambria Math"/>
+                        </a:rPr>
+                        <m:t>[</m:t>
+                      </m:r>
+                      <m:eqArr>
+                        <m:eqArrPr>
+                          <m:ctrlPr>
+                            <a:rPr sz="2200" i="1">
+                              <a:latin typeface="Cambria Math" panose="02040503050406030204" pitchFamily="18" charset="0"/>
+                            </a:rPr>
+                          </m:ctrlPr>
+                        </m:eqArrPr>
+                        <m:e>
+                          <m:f>
+                            <m:fPr>
+                              <m:ctrlPr>
+                                <a:rPr sz="2200" i="1">
+                                  <a:latin typeface="Cambria Math" panose="02040503050406030204" pitchFamily="18" charset="0"/>
+                                </a:rPr>
+                              </m:ctrlPr>
+                            </m:fPr>
+                            <m:num>
+                              <m:r>
+                                <a:rPr sz="2200">
+                                  <a:latin typeface="Cambria Math"/>
+                                </a:rPr>
+                                <m:t>𝜕</m:t>
+                              </m:r>
+                              <m:r>
+                                <a:rPr sz="2200">
+                                  <a:latin typeface="Cambria Math"/>
+                                </a:rPr>
+                                <m:t>𝑓</m:t>
+                              </m:r>
+                            </m:num>
+                            <m:den>
+                              <m:r>
+                                <a:rPr sz="2200">
+                                  <a:latin typeface="Cambria Math"/>
+                                </a:rPr>
+                                <m:t>𝜕</m:t>
+                              </m:r>
+                              <m:sSub>
+                                <m:sSubPr>
+                                  <m:ctrlPr>
+                                    <a:rPr sz="2200" i="1">
+                                      <a:latin typeface="Cambria Math" panose="02040503050406030204" pitchFamily="18" charset="0"/>
+                                    </a:rPr>
+                                  </m:ctrlPr>
+                                </m:sSubPr>
+                                <m:e>
+                                  <m:r>
+                                    <a:rPr sz="2200">
+                                      <a:latin typeface="Cambria Math"/>
+                                    </a:rPr>
+                                    <m:t>𝑥</m:t>
+                                  </m:r>
+                                </m:e>
+                                <m:sub>
+                                  <m:r>
+                                    <a:rPr sz="2200">
+                                      <a:latin typeface="Cambria Math"/>
+                                    </a:rPr>
+                                    <m:t>1</m:t>
+                                  </m:r>
+                                </m:sub>
+                              </m:sSub>
+                            </m:den>
+                          </m:f>
+                        </m:e>
+                        <m:e>
                           <m:r>
                             <a:rPr sz="2200">
                               <a:latin typeface="Cambria Math"/>
                             </a:rPr>
-                            <a:rPr sz="2200">
-                              <a:latin typeface="Cambria Math"/>
-                            </a:rPr>
-                            <m:t>∂f</m:t>
+                            <m:t>⋮</m:t>
                           </m:r>
-                        </m:num>
-                        <m:den>
-                          <m:r>
-                            <a:rPr sz="2200">
-                              <a:latin typeface="Cambria Math"/>
-                            </a:rPr>
-                            <a:rPr sz="2200">
-                              <a:latin typeface="Cambria Math"/>
-                            </a:rPr>
-                            <m:t>∂</m:t>
-                          </m:r>
-                          <m:sSub>
-                            <m:e>
+                        </m:e>
+                        <m:e>
+                          <m:f>
+                            <m:fPr>
+                              <m:ctrlPr>
+                                <a:rPr sz="2200" i="1">
+                                  <a:latin typeface="Cambria Math" panose="02040503050406030204" pitchFamily="18" charset="0"/>
+                                </a:rPr>
+                              </m:ctrlPr>
+                            </m:fPr>
+                            <m:num>
                               <m:r>
                                 <a:rPr sz="2200">
                                   <a:latin typeface="Cambria Math"/>
                                 </a:rPr>
-                                <a:rPr sz="2200">
-                                  <a:latin typeface="Cambria Math"/>
-                                </a:rPr>
-                                <m:t>x</m:t>
+                                <m:t>𝜕</m:t>
                               </m:r>
-                            </m:e>
-                            <m:sub>
                               <m:r>
                                 <a:rPr sz="2200">
                                   <a:latin typeface="Cambria Math"/>
                                 </a:rPr>
+                                <m:t>𝑓</m:t>
+                              </m:r>
+                            </m:num>
+                            <m:den>
+                              <m:r>
                                 <a:rPr sz="2200">
                                   <a:latin typeface="Cambria Math"/>
                                 </a:rPr>
-                                <m:t>1</m:t>
+                                <m:t>𝜕</m:t>
                               </m:r>
-                            </m:sub>
-                          </m:sSub>
-                        </m:den>
-                      </m:f>
-                    </m:e>
-                    <m:e>
+                              <m:sSub>
+                                <m:sSubPr>
+                                  <m:ctrlPr>
+                                    <a:rPr sz="2200" i="1">
+                                      <a:latin typeface="Cambria Math" panose="02040503050406030204" pitchFamily="18" charset="0"/>
+                                    </a:rPr>
+                                  </m:ctrlPr>
+                                </m:sSubPr>
+                                <m:e>
+                                  <m:r>
+                                    <a:rPr sz="2200">
+                                      <a:latin typeface="Cambria Math"/>
+                                    </a:rPr>
+                                    <m:t>𝑥</m:t>
+                                  </m:r>
+                                </m:e>
+                                <m:sub>
+                                  <m:r>
+                                    <a:rPr sz="2200">
+                                      <a:latin typeface="Cambria Math"/>
+                                    </a:rPr>
+                                    <m:t>𝑛</m:t>
+                                  </m:r>
+                                </m:sub>
+                              </m:sSub>
+                            </m:den>
+                          </m:f>
+                        </m:e>
+                      </m:eqArr>
                       <m:r>
                         <a:rPr sz="2200">
                           <a:latin typeface="Cambria Math"/>
                         </a:rPr>
-                        <a:rPr sz="2200">
-                          <a:latin typeface="Cambria Math"/>
-                        </a:rPr>
-                        <m:t>⋮</m:t>
+                        <m:t>]</m:t>
                       </m:r>
-                    </m:e>
-                    <m:e>
-                      <m:f>
-                        <m:fPr>
-                          <m:type m:val="bar"/>
-                        </m:fPr>
-                        <m:num>
-                          <m:r>
-                            <a:rPr sz="2200">
-                              <a:latin typeface="Cambria Math"/>
-                            </a:rPr>
-                            <a:rPr sz="2200">
-                              <a:latin typeface="Cambria Math"/>
-                            </a:rPr>
-                            <m:t>∂f</m:t>
-                          </m:r>
-                        </m:num>
-                        <m:den>
-                          <m:r>
-                            <a:rPr sz="2200">
-                              <a:latin typeface="Cambria Math"/>
-                            </a:rPr>
-                            <a:rPr sz="2200">
-                              <a:latin typeface="Cambria Math"/>
-                            </a:rPr>
-                            <m:t>∂</m:t>
-                          </m:r>
-                          <m:sSub>
-                            <m:e>
-                              <m:r>
-                                <a:rPr sz="2200">
-                                  <a:latin typeface="Cambria Math"/>
-                                </a:rPr>
-                                <a:rPr sz="2200">
-                                  <a:latin typeface="Cambria Math"/>
-                                </a:rPr>
-                                <m:t>x</m:t>
-                              </m:r>
-                            </m:e>
-                            <m:sub>
-                              <m:r>
-                                <a:rPr sz="2200">
-                                  <a:latin typeface="Cambria Math"/>
-                                </a:rPr>
-                                <a:rPr sz="2200">
-                                  <a:latin typeface="Cambria Math"/>
-                                </a:rPr>
-                                <m:t>n</m:t>
-                              </m:r>
-                            </m:sub>
-                          </m:sSub>
-                        </m:den>
-                      </m:f>
-                    </m:e>
-                  </m:eqArr>
-                  <m:r>
-                    <a:rPr sz="2200">
-                      <a:latin typeface="Cambria Math"/>
-                    </a:rPr>
-                    <a:rPr sz="2200">
-                      <a:latin typeface="Cambria Math"/>
-                    </a:rPr>
-                    <m:t>]</m:t>
-                  </m:r>
-                </m:oMath>
-              </m:oMathPara>
-            </ns0:m>
-          </a:p>
-          <a:p>
-            <a:pPr marL="0" indent="0">
-              <a:buNone/>
-              <a:lnSpc>
-                <a:spcPct val="115000"/>
-              </a:lnSpc>
-            </a:pPr>
-            <a:r>
-              <a:rPr sz="2200" b="1" i="0">
-                <a:latin typeface="Bookman Old Style"/>
-              </a:rPr>
-              <a:t>Условия успешной оптимизации:</a:t>
-            </a:r>
-          </a:p>
-          <a:p>
-            <a:pPr>
-              <a:lnSpc>
-                <a:spcPct val="115000"/>
-              </a:lnSpc>
-              <a:spcAft>
-                <a:spcPts val="0"/>
-              </a:spcAft>
-            </a:pPr>
-            <a:r>
-              <a:rPr sz="2200" b="0" i="0">
-                <a:latin typeface="Bookman Old Style"/>
-              </a:rPr>
-              <a:t>Если </a:t>
-            </a:r>
-            <ns0:m xmlns:ns0="http://schemas.microsoft.com/office/drawing/2010/main">
-              <m:oMathPara xmlns:m="http://schemas.openxmlformats.org/officeDocument/2006/math">
-                <m:oMath xmlns:mml="http://www.w3.org/1998/Math/MathML">
-                  <m:r>
-                    <a:rPr sz="2200">
-                      <a:latin typeface="Cambria Math"/>
-                    </a:rPr>
-                    <a:rPr sz="2200">
-                      <a:latin typeface="Cambria Math"/>
-                    </a:rPr>
-                    <m:t>α</m:t>
-                  </m:r>
-                </m:oMath>
-              </m:oMathPara>
-            </ns0:m>
-            <a:r>
-              <a:rPr sz="2200" b="0" i="0">
-                <a:latin typeface="Bookman Old Style"/>
-              </a:rPr>
-              <a:t> слишком велико, алгоритм может расходиться.</a:t>
-            </a:r>
-          </a:p>
-          <a:p>
-            <a:pPr>
-              <a:lnSpc>
-                <a:spcPct val="115000"/>
-              </a:lnSpc>
-              <a:spcAft>
-                <a:spcPts val="0"/>
-              </a:spcAft>
-            </a:pPr>
-            <a:r>
-              <a:rPr sz="2200" b="0" i="0">
-                <a:latin typeface="Bookman Old Style"/>
-              </a:rPr>
-              <a:t>Если </a:t>
-            </a:r>
-            <ns0:m xmlns:ns0="http://schemas.microsoft.com/office/drawing/2010/main">
-              <m:oMathPara xmlns:m="http://schemas.openxmlformats.org/officeDocument/2006/math">
-                <m:oMath xmlns:mml="http://www.w3.org/1998/Math/MathML">
-                  <m:r>
-                    <a:rPr sz="2200">
-                      <a:latin typeface="Cambria Math"/>
-                    </a:rPr>
-                    <a:rPr sz="2200">
-                      <a:latin typeface="Cambria Math"/>
-                    </a:rPr>
-                    <m:t>α</m:t>
-                  </m:r>
-                </m:oMath>
-              </m:oMathPara>
-            </ns0:m>
-            <a:r>
-              <a:rPr sz="2200" b="0" i="0">
-                <a:latin typeface="Bookman Old Style"/>
-              </a:rPr>
-              <a:t> слишком мало, обучение будет идти слишком медленно.</a:t>
-            </a:r>
-          </a:p>
-          <a:p>
-            <a:pPr>
-              <a:lnSpc>
-                <a:spcPct val="115000"/>
-              </a:lnSpc>
-              <a:spcAft>
-                <a:spcPts val="0"/>
-              </a:spcAft>
-            </a:pPr>
-            <a:r>
-              <a:rPr sz="2200" b="0" i="0">
-                <a:latin typeface="Bookman Old Style"/>
-              </a:rPr>
-              <a:t>В точке минимума </a:t>
-            </a:r>
-            <ns0:m xmlns:ns0="http://schemas.microsoft.com/office/drawing/2010/main">
-              <m:oMathPara xmlns:m="http://schemas.openxmlformats.org/officeDocument/2006/math">
-                <m:oMath xmlns:mml="http://www.w3.org/1998/Math/MathML">
-                  <m:r>
-                    <a:rPr sz="2200">
-                      <a:latin typeface="Cambria Math"/>
-                    </a:rPr>
-                    <a:rPr sz="2200">
-                      <a:latin typeface="Cambria Math"/>
-                    </a:rPr>
-                    <m:t>∇J(θ)≈0</m:t>
-                  </m:r>
-                </m:oMath>
-              </m:oMathPara>
-            </ns0:m>
-            <a:r>
-              <a:rPr sz="2200" b="0" i="0">
-                <a:latin typeface="Bookman Old Style"/>
-              </a:rPr>
-              <a:t>.</a:t>
-            </a:r>
-          </a:p>
-        </p:txBody>
-      </p:sp>
+                    </m:oMath>
+                  </m:oMathPara>
+                </a14:m>
+                <a:endParaRPr sz="2200" b="0" i="0" dirty="0">
+                  <a:latin typeface="Bookman Old Style"/>
+                </a:endParaRPr>
+              </a:p>
+              <a:p>
+                <a:pPr marL="0" indent="0">
+                  <a:buNone/>
+                </a:pPr>
+                <a:r>
+                  <a:rPr sz="2200" b="1" i="0" dirty="0" err="1">
+                    <a:latin typeface="Bookman Old Style"/>
+                  </a:rPr>
+                  <a:t>Условия</a:t>
+                </a:r>
+                <a:r>
+                  <a:rPr sz="2200" b="1" i="0" dirty="0">
+                    <a:latin typeface="Bookman Old Style"/>
+                  </a:rPr>
+                  <a:t> </a:t>
+                </a:r>
+                <a:r>
+                  <a:rPr sz="2200" b="1" i="0" dirty="0" err="1">
+                    <a:latin typeface="Bookman Old Style"/>
+                  </a:rPr>
+                  <a:t>успешной</a:t>
+                </a:r>
+                <a:r>
+                  <a:rPr sz="2200" b="1" i="0" dirty="0">
+                    <a:latin typeface="Bookman Old Style"/>
+                  </a:rPr>
+                  <a:t> </a:t>
+                </a:r>
+                <a:r>
+                  <a:rPr sz="2200" b="1" i="0" dirty="0" err="1">
+                    <a:latin typeface="Bookman Old Style"/>
+                  </a:rPr>
+                  <a:t>оптимизации</a:t>
+                </a:r>
+                <a:r>
+                  <a:rPr sz="2200" b="1" i="0" dirty="0">
+                    <a:latin typeface="Bookman Old Style"/>
+                  </a:rPr>
+                  <a:t>:</a:t>
+                </a:r>
+              </a:p>
+              <a:p>
+                <a:pPr>
+                  <a:lnSpc>
+                    <a:spcPct val="115000"/>
+                  </a:lnSpc>
+                  <a:spcAft>
+                    <a:spcPts val="0"/>
+                  </a:spcAft>
+                </a:pPr>
+                <a:r>
+                  <a:rPr sz="2200" b="0" i="0" dirty="0" err="1">
+                    <a:latin typeface="Bookman Old Style"/>
+                  </a:rPr>
+                  <a:t>Если</a:t>
+                </a:r>
+                <a:r>
+                  <a:rPr sz="2200" b="0" i="0" dirty="0">
+                    <a:latin typeface="Bookman Old Style"/>
+                  </a:rPr>
+                  <a:t> </a:t>
+                </a:r>
+                <a14:m>
+                  <m:oMath xmlns:m="http://schemas.openxmlformats.org/officeDocument/2006/math">
+                    <m:r>
+                      <a:rPr sz="2200">
+                        <a:latin typeface="Cambria Math"/>
+                      </a:rPr>
+                      <m:t>𝛼</m:t>
+                    </m:r>
+                  </m:oMath>
+                </a14:m>
+                <a:r>
+                  <a:rPr sz="2200" b="0" i="0" dirty="0">
+                    <a:latin typeface="Bookman Old Style"/>
+                  </a:rPr>
+                  <a:t> </a:t>
+                </a:r>
+                <a:r>
+                  <a:rPr sz="2200" b="0" i="0" dirty="0" err="1">
+                    <a:latin typeface="Bookman Old Style"/>
+                  </a:rPr>
+                  <a:t>слишком</a:t>
+                </a:r>
+                <a:r>
+                  <a:rPr sz="2200" b="0" i="0" dirty="0">
+                    <a:latin typeface="Bookman Old Style"/>
+                  </a:rPr>
+                  <a:t> </a:t>
+                </a:r>
+                <a:r>
+                  <a:rPr sz="2200" b="0" i="0" dirty="0" err="1">
+                    <a:latin typeface="Bookman Old Style"/>
+                  </a:rPr>
+                  <a:t>велико</a:t>
+                </a:r>
+                <a:r>
+                  <a:rPr sz="2200" b="0" i="0" dirty="0">
+                    <a:latin typeface="Bookman Old Style"/>
+                  </a:rPr>
+                  <a:t>, </a:t>
+                </a:r>
+                <a:r>
+                  <a:rPr sz="2200" b="0" i="0" dirty="0" err="1">
+                    <a:latin typeface="Bookman Old Style"/>
+                  </a:rPr>
+                  <a:t>алгоритм</a:t>
+                </a:r>
+                <a:r>
+                  <a:rPr sz="2200" b="0" i="0" dirty="0">
+                    <a:latin typeface="Bookman Old Style"/>
+                  </a:rPr>
+                  <a:t> </a:t>
+                </a:r>
+                <a:r>
+                  <a:rPr sz="2200" b="0" i="0" dirty="0" err="1">
+                    <a:latin typeface="Bookman Old Style"/>
+                  </a:rPr>
+                  <a:t>может</a:t>
+                </a:r>
+                <a:r>
+                  <a:rPr sz="2200" b="0" i="0" dirty="0">
+                    <a:latin typeface="Bookman Old Style"/>
+                  </a:rPr>
+                  <a:t> </a:t>
+                </a:r>
+                <a:r>
+                  <a:rPr sz="2200" b="0" i="0" dirty="0" err="1">
+                    <a:latin typeface="Bookman Old Style"/>
+                  </a:rPr>
+                  <a:t>расходиться</a:t>
+                </a:r>
+                <a:r>
+                  <a:rPr sz="2200" b="0" i="0" dirty="0">
+                    <a:latin typeface="Bookman Old Style"/>
+                  </a:rPr>
+                  <a:t>.</a:t>
+                </a:r>
+              </a:p>
+              <a:p>
+                <a:pPr>
+                  <a:lnSpc>
+                    <a:spcPct val="115000"/>
+                  </a:lnSpc>
+                  <a:spcAft>
+                    <a:spcPts val="0"/>
+                  </a:spcAft>
+                </a:pPr>
+                <a:r>
+                  <a:rPr sz="2200" b="0" i="0" dirty="0" err="1">
+                    <a:latin typeface="Bookman Old Style"/>
+                  </a:rPr>
+                  <a:t>Если</a:t>
+                </a:r>
+                <a:r>
+                  <a:rPr sz="2200" b="0" i="0" dirty="0">
+                    <a:latin typeface="Bookman Old Style"/>
+                  </a:rPr>
+                  <a:t> </a:t>
+                </a:r>
+                <a14:m>
+                  <m:oMath xmlns:m="http://schemas.openxmlformats.org/officeDocument/2006/math">
+                    <m:r>
+                      <a:rPr sz="2200">
+                        <a:latin typeface="Cambria Math"/>
+                      </a:rPr>
+                      <m:t>𝛼</m:t>
+                    </m:r>
+                  </m:oMath>
+                </a14:m>
+                <a:r>
+                  <a:rPr sz="2200" b="0" i="0" dirty="0">
+                    <a:latin typeface="Bookman Old Style"/>
+                  </a:rPr>
+                  <a:t> </a:t>
+                </a:r>
+                <a:r>
+                  <a:rPr sz="2200" b="0" i="0" dirty="0" err="1">
+                    <a:latin typeface="Bookman Old Style"/>
+                  </a:rPr>
+                  <a:t>слишком</a:t>
+                </a:r>
+                <a:r>
+                  <a:rPr sz="2200" b="0" i="0" dirty="0">
+                    <a:latin typeface="Bookman Old Style"/>
+                  </a:rPr>
+                  <a:t> </a:t>
+                </a:r>
+                <a:r>
+                  <a:rPr sz="2200" b="0" i="0" dirty="0" err="1">
+                    <a:latin typeface="Bookman Old Style"/>
+                  </a:rPr>
+                  <a:t>мало</a:t>
+                </a:r>
+                <a:r>
+                  <a:rPr sz="2200" b="0" i="0" dirty="0">
+                    <a:latin typeface="Bookman Old Style"/>
+                  </a:rPr>
+                  <a:t>, </a:t>
+                </a:r>
+                <a:r>
+                  <a:rPr sz="2200" b="0" i="0" dirty="0" err="1">
+                    <a:latin typeface="Bookman Old Style"/>
+                  </a:rPr>
+                  <a:t>обучение</a:t>
+                </a:r>
+                <a:r>
+                  <a:rPr sz="2200" b="0" i="0" dirty="0">
+                    <a:latin typeface="Bookman Old Style"/>
+                  </a:rPr>
+                  <a:t> </a:t>
+                </a:r>
+                <a:r>
+                  <a:rPr sz="2200" b="0" i="0" dirty="0" err="1">
+                    <a:latin typeface="Bookman Old Style"/>
+                  </a:rPr>
+                  <a:t>будет</a:t>
+                </a:r>
+                <a:r>
+                  <a:rPr sz="2200" b="0" i="0" dirty="0">
+                    <a:latin typeface="Bookman Old Style"/>
+                  </a:rPr>
+                  <a:t> </a:t>
+                </a:r>
+                <a:r>
+                  <a:rPr sz="2200" b="0" i="0" dirty="0" err="1">
+                    <a:latin typeface="Bookman Old Style"/>
+                  </a:rPr>
+                  <a:t>идти</a:t>
+                </a:r>
+                <a:r>
+                  <a:rPr sz="2200" b="0" i="0" dirty="0">
+                    <a:latin typeface="Bookman Old Style"/>
+                  </a:rPr>
+                  <a:t> </a:t>
+                </a:r>
+                <a:r>
+                  <a:rPr sz="2200" b="0" i="0" dirty="0" err="1">
+                    <a:latin typeface="Bookman Old Style"/>
+                  </a:rPr>
+                  <a:t>слишком</a:t>
+                </a:r>
+                <a:r>
+                  <a:rPr sz="2200" b="0" i="0" dirty="0">
+                    <a:latin typeface="Bookman Old Style"/>
+                  </a:rPr>
+                  <a:t> </a:t>
+                </a:r>
+                <a:r>
+                  <a:rPr sz="2200" b="0" i="0" dirty="0" err="1">
+                    <a:latin typeface="Bookman Old Style"/>
+                  </a:rPr>
+                  <a:t>медленно</a:t>
+                </a:r>
+                <a:r>
+                  <a:rPr sz="2200" b="0" i="0" dirty="0">
+                    <a:latin typeface="Bookman Old Style"/>
+                  </a:rPr>
+                  <a:t>.</a:t>
+                </a:r>
+              </a:p>
+              <a:p>
+                <a:pPr>
+                  <a:lnSpc>
+                    <a:spcPct val="115000"/>
+                  </a:lnSpc>
+                  <a:spcAft>
+                    <a:spcPts val="0"/>
+                  </a:spcAft>
+                </a:pPr>
+                <a:r>
+                  <a:rPr sz="2200" b="0" i="0" dirty="0">
+                    <a:latin typeface="Bookman Old Style"/>
+                  </a:rPr>
+                  <a:t>В </a:t>
+                </a:r>
+                <a:r>
+                  <a:rPr sz="2200" b="0" i="0" dirty="0" err="1">
+                    <a:latin typeface="Bookman Old Style"/>
+                  </a:rPr>
+                  <a:t>точке</a:t>
+                </a:r>
+                <a:r>
+                  <a:rPr sz="2200" b="0" i="0" dirty="0">
+                    <a:latin typeface="Bookman Old Style"/>
+                  </a:rPr>
+                  <a:t> </a:t>
+                </a:r>
+                <a:r>
+                  <a:rPr sz="2200" b="0" i="0" dirty="0" err="1">
+                    <a:latin typeface="Bookman Old Style"/>
+                  </a:rPr>
+                  <a:t>минимума</a:t>
+                </a:r>
+                <a:r>
+                  <a:rPr sz="2200" b="0" i="0" dirty="0">
+                    <a:latin typeface="Bookman Old Style"/>
+                  </a:rPr>
+                  <a:t> </a:t>
+                </a:r>
+                <a14:m>
+                  <m:oMath xmlns:m="http://schemas.openxmlformats.org/officeDocument/2006/math">
+                    <m:r>
+                      <a:rPr sz="2200">
+                        <a:latin typeface="Cambria Math"/>
+                      </a:rPr>
+                      <m:t>𝛻</m:t>
+                    </m:r>
+                    <m:r>
+                      <a:rPr sz="2200">
+                        <a:latin typeface="Cambria Math"/>
+                      </a:rPr>
+                      <m:t>𝐽</m:t>
+                    </m:r>
+                    <m:r>
+                      <a:rPr sz="2200">
+                        <a:latin typeface="Cambria Math"/>
+                      </a:rPr>
+                      <m:t>(</m:t>
+                    </m:r>
+                    <m:r>
+                      <a:rPr sz="2200">
+                        <a:latin typeface="Cambria Math"/>
+                      </a:rPr>
+                      <m:t>𝜃</m:t>
+                    </m:r>
+                    <m:r>
+                      <a:rPr sz="2200">
+                        <a:latin typeface="Cambria Math"/>
+                      </a:rPr>
+                      <m:t>)≈</m:t>
+                    </m:r>
+                    <m:r>
+                      <a:rPr sz="2200">
+                        <a:latin typeface="Cambria Math"/>
+                      </a:rPr>
+                      <m:t>0</m:t>
+                    </m:r>
+                  </m:oMath>
+                </a14:m>
+                <a:r>
+                  <a:rPr sz="2200" b="0" i="0" dirty="0">
+                    <a:latin typeface="Bookman Old Style"/>
+                  </a:rPr>
+                  <a:t>.</a:t>
+                </a:r>
+              </a:p>
+            </p:txBody>
+          </p:sp>
+        </mc:Choice>
+        <mc:Fallback>
+          <p:sp>
+            <p:nvSpPr>
+              <p:cNvPr id="3" name="Content Placeholder 2"/>
+              <p:cNvSpPr>
+                <a:spLocks noGrp="1" noRot="1" noChangeAspect="1" noMove="1" noResize="1" noEditPoints="1" noAdjustHandles="1" noChangeArrowheads="1" noChangeShapeType="1" noTextEdit="1"/>
+              </p:cNvSpPr>
+              <p:nvPr>
+                <p:ph idx="1"/>
+              </p:nvPr>
+            </p:nvSpPr>
+            <p:spPr>
+              <a:xfrm>
+                <a:off x="0" y="432000"/>
+                <a:ext cx="12192000" cy="5994000"/>
+              </a:xfrm>
+              <a:blipFill rotWithShape="0">
+                <a:blip r:embed="rId2"/>
+                <a:stretch>
+                  <a:fillRect t="-610"/>
+                </a:stretch>
+              </a:blipFill>
+            </p:spPr>
+            <p:txBody>
+              <a:bodyPr/>
+              <a:lstStyle/>
+              <a:p>
+                <a:r>
+                  <a:rPr lang="ru-RU">
+                    <a:noFill/>
+                  </a:rPr>
+                  <a:t> </a:t>
+                </a:r>
+              </a:p>
+            </p:txBody>
+          </p:sp>
+        </mc:Fallback>
+      </mc:AlternateContent>
       <p:sp>
         <p:nvSpPr>
           <p:cNvPr id="4" name="TextBox 3"/>
